--- a/Experiencia de Aprendizaje 2 - Desarrollo de Agente Inteligentes con AI/Clase 2.4/Clase 2.4.pptx
+++ b/Experiencia de Aprendizaje 2 - Desarrollo de Agente Inteligentes con AI/Clase 2.4/Clase 2.4.pptx
@@ -5,20 +5,21 @@
     <p:sldMasterId id="2147483648" r:id="rId1"/>
   </p:sldMasterIdLst>
   <p:notesMasterIdLst>
-    <p:notesMasterId r:id="rId13"/>
+    <p:notesMasterId r:id="rId14"/>
   </p:notesMasterIdLst>
   <p:sldIdLst>
     <p:sldId id="256" r:id="rId2"/>
     <p:sldId id="258" r:id="rId3"/>
-    <p:sldId id="295" r:id="rId4"/>
-    <p:sldId id="279" r:id="rId5"/>
-    <p:sldId id="296" r:id="rId6"/>
-    <p:sldId id="297" r:id="rId7"/>
-    <p:sldId id="298" r:id="rId8"/>
-    <p:sldId id="299" r:id="rId9"/>
-    <p:sldId id="300" r:id="rId10"/>
-    <p:sldId id="301" r:id="rId11"/>
-    <p:sldId id="302" r:id="rId12"/>
+    <p:sldId id="303" r:id="rId4"/>
+    <p:sldId id="295" r:id="rId5"/>
+    <p:sldId id="279" r:id="rId6"/>
+    <p:sldId id="296" r:id="rId7"/>
+    <p:sldId id="297" r:id="rId8"/>
+    <p:sldId id="298" r:id="rId9"/>
+    <p:sldId id="299" r:id="rId10"/>
+    <p:sldId id="300" r:id="rId11"/>
+    <p:sldId id="301" r:id="rId12"/>
+    <p:sldId id="302" r:id="rId13"/>
   </p:sldIdLst>
   <p:sldSz cx="12192000" cy="6858000"/>
   <p:notesSz cx="6858000" cy="9144000"/>
@@ -207,7 +208,7 @@
           <a:p>
             <a:fld id="{87BDCB0C-69E9-4911-980B-989A824EA717}" type="datetimeFigureOut">
               <a:rPr lang="es-CL" smtClean="0"/>
-              <a:t>25-04-2026</a:t>
+              <a:t>26-04-2026</a:t>
             </a:fld>
             <a:endParaRPr lang="es-CL"/>
           </a:p>
@@ -571,7 +572,7 @@
           <a:p>
             <a:fld id="{2107F482-7FF7-4DD4-AE91-ACA70D5B43D5}" type="slidenum">
               <a:rPr lang="es-CL" smtClean="0"/>
-              <a:t>3</a:t>
+              <a:t>4</a:t>
             </a:fld>
             <a:endParaRPr lang="es-CL"/>
           </a:p>
@@ -686,7 +687,7 @@
           <a:p>
             <a:fld id="{2107F482-7FF7-4DD4-AE91-ACA70D5B43D5}" type="slidenum">
               <a:rPr lang="es-CL" smtClean="0"/>
-              <a:t>4</a:t>
+              <a:t>5</a:t>
             </a:fld>
             <a:endParaRPr lang="es-CL"/>
           </a:p>
@@ -801,7 +802,7 @@
           <a:p>
             <a:fld id="{2107F482-7FF7-4DD4-AE91-ACA70D5B43D5}" type="slidenum">
               <a:rPr lang="es-CL" smtClean="0"/>
-              <a:t>5</a:t>
+              <a:t>6</a:t>
             </a:fld>
             <a:endParaRPr lang="es-CL"/>
           </a:p>
@@ -916,7 +917,7 @@
           <a:p>
             <a:fld id="{2107F482-7FF7-4DD4-AE91-ACA70D5B43D5}" type="slidenum">
               <a:rPr lang="es-CL" smtClean="0"/>
-              <a:t>6</a:t>
+              <a:t>7</a:t>
             </a:fld>
             <a:endParaRPr lang="es-CL"/>
           </a:p>
@@ -1031,7 +1032,7 @@
           <a:p>
             <a:fld id="{2107F482-7FF7-4DD4-AE91-ACA70D5B43D5}" type="slidenum">
               <a:rPr lang="es-CL" smtClean="0"/>
-              <a:t>7</a:t>
+              <a:t>8</a:t>
             </a:fld>
             <a:endParaRPr lang="es-CL"/>
           </a:p>
@@ -1146,7 +1147,7 @@
           <a:p>
             <a:fld id="{2107F482-7FF7-4DD4-AE91-ACA70D5B43D5}" type="slidenum">
               <a:rPr lang="es-CL" smtClean="0"/>
-              <a:t>8</a:t>
+              <a:t>9</a:t>
             </a:fld>
             <a:endParaRPr lang="es-CL"/>
           </a:p>
@@ -1261,7 +1262,7 @@
           <a:p>
             <a:fld id="{2107F482-7FF7-4DD4-AE91-ACA70D5B43D5}" type="slidenum">
               <a:rPr lang="es-CL" smtClean="0"/>
-              <a:t>9</a:t>
+              <a:t>10</a:t>
             </a:fld>
             <a:endParaRPr lang="es-CL"/>
           </a:p>
@@ -1376,7 +1377,7 @@
           <a:p>
             <a:fld id="{2107F482-7FF7-4DD4-AE91-ACA70D5B43D5}" type="slidenum">
               <a:rPr lang="es-CL" smtClean="0"/>
-              <a:t>10</a:t>
+              <a:t>11</a:t>
             </a:fld>
             <a:endParaRPr lang="es-CL"/>
           </a:p>
@@ -1491,7 +1492,7 @@
           <a:p>
             <a:fld id="{2107F482-7FF7-4DD4-AE91-ACA70D5B43D5}" type="slidenum">
               <a:rPr lang="es-CL" smtClean="0"/>
-              <a:t>11</a:t>
+              <a:t>12</a:t>
             </a:fld>
             <a:endParaRPr lang="es-CL"/>
           </a:p>
@@ -1659,7 +1660,7 @@
           <a:p>
             <a:fld id="{E8BDA46D-A1A7-4D05-A86A-5A57D57622A5}" type="datetimeFigureOut">
               <a:rPr lang="es-CL" smtClean="0"/>
-              <a:t>25-04-2026</a:t>
+              <a:t>26-04-2026</a:t>
             </a:fld>
             <a:endParaRPr lang="es-CL"/>
           </a:p>
@@ -1859,7 +1860,7 @@
           <a:p>
             <a:fld id="{E8BDA46D-A1A7-4D05-A86A-5A57D57622A5}" type="datetimeFigureOut">
               <a:rPr lang="es-CL" smtClean="0"/>
-              <a:t>25-04-2026</a:t>
+              <a:t>26-04-2026</a:t>
             </a:fld>
             <a:endParaRPr lang="es-CL"/>
           </a:p>
@@ -2069,7 +2070,7 @@
           <a:p>
             <a:fld id="{E8BDA46D-A1A7-4D05-A86A-5A57D57622A5}" type="datetimeFigureOut">
               <a:rPr lang="es-CL" smtClean="0"/>
-              <a:t>25-04-2026</a:t>
+              <a:t>26-04-2026</a:t>
             </a:fld>
             <a:endParaRPr lang="es-CL"/>
           </a:p>
@@ -2269,7 +2270,7 @@
           <a:p>
             <a:fld id="{E8BDA46D-A1A7-4D05-A86A-5A57D57622A5}" type="datetimeFigureOut">
               <a:rPr lang="es-CL" smtClean="0"/>
-              <a:t>25-04-2026</a:t>
+              <a:t>26-04-2026</a:t>
             </a:fld>
             <a:endParaRPr lang="es-CL"/>
           </a:p>
@@ -2545,7 +2546,7 @@
           <a:p>
             <a:fld id="{E8BDA46D-A1A7-4D05-A86A-5A57D57622A5}" type="datetimeFigureOut">
               <a:rPr lang="es-CL" smtClean="0"/>
-              <a:t>25-04-2026</a:t>
+              <a:t>26-04-2026</a:t>
             </a:fld>
             <a:endParaRPr lang="es-CL"/>
           </a:p>
@@ -2813,7 +2814,7 @@
           <a:p>
             <a:fld id="{E8BDA46D-A1A7-4D05-A86A-5A57D57622A5}" type="datetimeFigureOut">
               <a:rPr lang="es-CL" smtClean="0"/>
-              <a:t>25-04-2026</a:t>
+              <a:t>26-04-2026</a:t>
             </a:fld>
             <a:endParaRPr lang="es-CL"/>
           </a:p>
@@ -3228,7 +3229,7 @@
           <a:p>
             <a:fld id="{E8BDA46D-A1A7-4D05-A86A-5A57D57622A5}" type="datetimeFigureOut">
               <a:rPr lang="es-CL" smtClean="0"/>
-              <a:t>25-04-2026</a:t>
+              <a:t>26-04-2026</a:t>
             </a:fld>
             <a:endParaRPr lang="es-CL"/>
           </a:p>
@@ -3370,7 +3371,7 @@
           <a:p>
             <a:fld id="{E8BDA46D-A1A7-4D05-A86A-5A57D57622A5}" type="datetimeFigureOut">
               <a:rPr lang="es-CL" smtClean="0"/>
-              <a:t>25-04-2026</a:t>
+              <a:t>26-04-2026</a:t>
             </a:fld>
             <a:endParaRPr lang="es-CL"/>
           </a:p>
@@ -3483,7 +3484,7 @@
           <a:p>
             <a:fld id="{E8BDA46D-A1A7-4D05-A86A-5A57D57622A5}" type="datetimeFigureOut">
               <a:rPr lang="es-CL" smtClean="0"/>
-              <a:t>25-04-2026</a:t>
+              <a:t>26-04-2026</a:t>
             </a:fld>
             <a:endParaRPr lang="es-CL"/>
           </a:p>
@@ -3796,7 +3797,7 @@
           <a:p>
             <a:fld id="{E8BDA46D-A1A7-4D05-A86A-5A57D57622A5}" type="datetimeFigureOut">
               <a:rPr lang="es-CL" smtClean="0"/>
-              <a:t>25-04-2026</a:t>
+              <a:t>26-04-2026</a:t>
             </a:fld>
             <a:endParaRPr lang="es-CL"/>
           </a:p>
@@ -4085,7 +4086,7 @@
           <a:p>
             <a:fld id="{E8BDA46D-A1A7-4D05-A86A-5A57D57622A5}" type="datetimeFigureOut">
               <a:rPr lang="es-CL" smtClean="0"/>
-              <a:t>25-04-2026</a:t>
+              <a:t>26-04-2026</a:t>
             </a:fld>
             <a:endParaRPr lang="es-CL"/>
           </a:p>
@@ -4328,7 +4329,7 @@
           <a:p>
             <a:fld id="{E8BDA46D-A1A7-4D05-A86A-5A57D57622A5}" type="datetimeFigureOut">
               <a:rPr lang="es-CL" smtClean="0"/>
-              <a:t>25-04-2026</a:t>
+              <a:t>26-04-2026</a:t>
             </a:fld>
             <a:endParaRPr lang="es-CL"/>
           </a:p>
@@ -5092,6 +5093,475 @@
         <p:cNvPr id="1" name="">
           <a:extLst>
             <a:ext uri="{FF2B5EF4-FFF2-40B4-BE49-F238E27FC236}">
+              <a16:creationId xmlns:a16="http://schemas.microsoft.com/office/drawing/2014/main" id="{2FE344CD-8D15-CD7A-5865-FDBFE506EAEA}"/>
+            </a:ext>
+          </a:extLst>
+        </p:cNvPr>
+        <p:cNvGrpSpPr/>
+        <p:nvPr/>
+      </p:nvGrpSpPr>
+      <p:grpSpPr>
+        <a:xfrm>
+          <a:off x="0" y="0"/>
+          <a:ext cx="0" cy="0"/>
+          <a:chOff x="0" y="0"/>
+          <a:chExt cx="0" cy="0"/>
+        </a:xfrm>
+      </p:grpSpPr>
+      <p:pic>
+        <p:nvPicPr>
+          <p:cNvPr id="4" name="Picture 2" descr="Duoc UC - Learn Chile">
+            <a:extLst>
+              <a:ext uri="{FF2B5EF4-FFF2-40B4-BE49-F238E27FC236}">
+                <a16:creationId xmlns:a16="http://schemas.microsoft.com/office/drawing/2014/main" id="{BF74DDA2-45FA-6C30-9987-5E6C88AE6452}"/>
+              </a:ext>
+            </a:extLst>
+          </p:cNvPr>
+          <p:cNvPicPr>
+            <a:picLocks noChangeAspect="1" noChangeArrowheads="1"/>
+          </p:cNvPicPr>
+          <p:nvPr/>
+        </p:nvPicPr>
+        <p:blipFill>
+          <a:blip r:embed="rId3">
+            <a:extLst>
+              <a:ext uri="{28A0092B-C50C-407E-A947-70E740481C1C}">
+                <a14:useLocalDpi xmlns:a14="http://schemas.microsoft.com/office/drawing/2010/main" val="0"/>
+              </a:ext>
+            </a:extLst>
+          </a:blip>
+          <a:srcRect/>
+          <a:stretch>
+            <a:fillRect/>
+          </a:stretch>
+        </p:blipFill>
+        <p:spPr bwMode="auto">
+          <a:xfrm>
+            <a:off x="11135913" y="30480"/>
+            <a:ext cx="974807" cy="825402"/>
+          </a:xfrm>
+          <a:prstGeom prst="rect">
+            <a:avLst/>
+          </a:prstGeom>
+          <a:noFill/>
+          <a:extLst>
+            <a:ext uri="{909E8E84-426E-40DD-AFC4-6F175D3DCCD1}">
+              <a14:hiddenFill xmlns:a14="http://schemas.microsoft.com/office/drawing/2010/main">
+                <a:solidFill>
+                  <a:srgbClr val="FFFFFF"/>
+                </a:solidFill>
+              </a14:hiddenFill>
+            </a:ext>
+          </a:extLst>
+        </p:spPr>
+      </p:pic>
+      <p:sp>
+        <p:nvSpPr>
+          <p:cNvPr id="2" name="Título 1">
+            <a:extLst>
+              <a:ext uri="{FF2B5EF4-FFF2-40B4-BE49-F238E27FC236}">
+                <a16:creationId xmlns:a16="http://schemas.microsoft.com/office/drawing/2014/main" id="{D9E673CE-F4E8-7F8B-11A6-547FC7569386}"/>
+              </a:ext>
+            </a:extLst>
+          </p:cNvPr>
+          <p:cNvSpPr txBox="1">
+            <a:spLocks/>
+          </p:cNvSpPr>
+          <p:nvPr/>
+        </p:nvSpPr>
+        <p:spPr>
+          <a:xfrm>
+            <a:off x="989606" y="284087"/>
+            <a:ext cx="9768840" cy="1325563"/>
+          </a:xfrm>
+          <a:prstGeom prst="rect">
+            <a:avLst/>
+          </a:prstGeom>
+        </p:spPr>
+        <p:txBody>
+          <a:bodyPr vert="horz" lIns="91440" tIns="45720" rIns="91440" bIns="45720" rtlCol="0" anchor="ctr">
+            <a:normAutofit/>
+          </a:bodyPr>
+          <a:lstStyle>
+            <a:lvl1pPr algn="l" defTabSz="914400" rtl="0" eaLnBrk="1" latinLnBrk="0" hangingPunct="1">
+              <a:lnSpc>
+                <a:spcPct val="90000"/>
+              </a:lnSpc>
+              <a:spcBef>
+                <a:spcPct val="0"/>
+              </a:spcBef>
+              <a:buNone/>
+              <a:defRPr sz="4400" kern="1200">
+                <a:solidFill>
+                  <a:schemeClr val="tx1"/>
+                </a:solidFill>
+                <a:latin typeface="+mj-lt"/>
+                <a:ea typeface="+mj-ea"/>
+                <a:cs typeface="+mj-cs"/>
+              </a:defRPr>
+            </a:lvl1pPr>
+          </a:lstStyle>
+          <a:p>
+            <a:endParaRPr lang="es-CL" sz="3200" i="1" dirty="0"/>
+          </a:p>
+        </p:txBody>
+      </p:sp>
+      <p:sp>
+        <p:nvSpPr>
+          <p:cNvPr id="7" name="Título 1">
+            <a:extLst>
+              <a:ext uri="{FF2B5EF4-FFF2-40B4-BE49-F238E27FC236}">
+                <a16:creationId xmlns:a16="http://schemas.microsoft.com/office/drawing/2014/main" id="{317209E0-A3EA-FBC7-1445-FF8076BB9477}"/>
+              </a:ext>
+            </a:extLst>
+          </p:cNvPr>
+          <p:cNvSpPr>
+            <a:spLocks noGrp="1"/>
+          </p:cNvSpPr>
+          <p:nvPr>
+            <p:ph type="title"/>
+          </p:nvPr>
+        </p:nvSpPr>
+        <p:spPr>
+          <a:xfrm>
+            <a:off x="498255" y="343719"/>
+            <a:ext cx="10515600" cy="1325563"/>
+          </a:xfrm>
+        </p:spPr>
+        <p:txBody>
+          <a:bodyPr/>
+          <a:lstStyle/>
+          <a:p>
+            <a:r>
+              <a:rPr lang="es-CL" b="1" i="1" dirty="0" err="1"/>
+              <a:t>Router</a:t>
+            </a:r>
+            <a:r>
+              <a:rPr lang="es-MX" b="1" i="1" dirty="0"/>
+              <a:t>: </a:t>
+            </a:r>
+            <a:r>
+              <a:rPr lang="es-MX" i="1" dirty="0"/>
+              <a:t>Dirige y ejecuta en paralelo.</a:t>
+            </a:r>
+            <a:endParaRPr lang="es-CL" i="1" dirty="0"/>
+          </a:p>
+        </p:txBody>
+      </p:sp>
+      <p:sp>
+        <p:nvSpPr>
+          <p:cNvPr id="14" name="Título 1">
+            <a:extLst>
+              <a:ext uri="{FF2B5EF4-FFF2-40B4-BE49-F238E27FC236}">
+                <a16:creationId xmlns:a16="http://schemas.microsoft.com/office/drawing/2014/main" id="{1D4AB7AB-8D14-453C-6AB8-01DC8EE227F9}"/>
+              </a:ext>
+            </a:extLst>
+          </p:cNvPr>
+          <p:cNvSpPr txBox="1">
+            <a:spLocks/>
+          </p:cNvSpPr>
+          <p:nvPr/>
+        </p:nvSpPr>
+        <p:spPr>
+          <a:xfrm>
+            <a:off x="-1256525" y="6313360"/>
+            <a:ext cx="9267049" cy="454119"/>
+          </a:xfrm>
+          <a:prstGeom prst="rect">
+            <a:avLst/>
+          </a:prstGeom>
+        </p:spPr>
+        <p:txBody>
+          <a:bodyPr vert="horz" lIns="91440" tIns="45720" rIns="91440" bIns="45720" rtlCol="0" anchor="ctr">
+            <a:normAutofit/>
+          </a:bodyPr>
+          <a:lstStyle>
+            <a:lvl1pPr algn="l" defTabSz="914400" rtl="0" eaLnBrk="1" latinLnBrk="0" hangingPunct="1">
+              <a:lnSpc>
+                <a:spcPct val="90000"/>
+              </a:lnSpc>
+              <a:spcBef>
+                <a:spcPct val="0"/>
+              </a:spcBef>
+              <a:buNone/>
+              <a:defRPr sz="4400" kern="1200">
+                <a:solidFill>
+                  <a:schemeClr val="tx1"/>
+                </a:solidFill>
+                <a:latin typeface="+mj-lt"/>
+                <a:ea typeface="+mj-ea"/>
+                <a:cs typeface="+mj-cs"/>
+              </a:defRPr>
+            </a:lvl1pPr>
+          </a:lstStyle>
+          <a:p>
+            <a:pPr algn="ctr"/>
+            <a:r>
+              <a:rPr lang="es-MX" sz="1600" b="1" i="1" dirty="0"/>
+              <a:t>Nota: </a:t>
+            </a:r>
+            <a:r>
+              <a:rPr lang="es-MX" sz="1600" i="1" dirty="0"/>
+              <a:t>https://docs.langchain.com/oss/python/langchain/multi-agent#router-4</a:t>
+            </a:r>
+            <a:endParaRPr lang="es-CL" sz="1600" i="1" dirty="0"/>
+          </a:p>
+        </p:txBody>
+      </p:sp>
+      <p:sp>
+        <p:nvSpPr>
+          <p:cNvPr id="3" name="Título 1">
+            <a:extLst>
+              <a:ext uri="{FF2B5EF4-FFF2-40B4-BE49-F238E27FC236}">
+                <a16:creationId xmlns:a16="http://schemas.microsoft.com/office/drawing/2014/main" id="{5A21F95A-FCE4-6C60-05D3-29A29C83D74B}"/>
+              </a:ext>
+            </a:extLst>
+          </p:cNvPr>
+          <p:cNvSpPr txBox="1">
+            <a:spLocks/>
+          </p:cNvSpPr>
+          <p:nvPr/>
+        </p:nvSpPr>
+        <p:spPr>
+          <a:xfrm>
+            <a:off x="867548" y="1609650"/>
+            <a:ext cx="4455551" cy="1325563"/>
+          </a:xfrm>
+          <a:prstGeom prst="rect">
+            <a:avLst/>
+          </a:prstGeom>
+        </p:spPr>
+        <p:txBody>
+          <a:bodyPr vert="horz" lIns="91440" tIns="45720" rIns="91440" bIns="45720" rtlCol="0" anchor="ctr">
+            <a:normAutofit fontScale="25000" lnSpcReduction="20000"/>
+          </a:bodyPr>
+          <a:lstStyle>
+            <a:lvl1pPr algn="l" defTabSz="914400" rtl="0" eaLnBrk="1" latinLnBrk="0" hangingPunct="1">
+              <a:lnSpc>
+                <a:spcPct val="90000"/>
+              </a:lnSpc>
+              <a:spcBef>
+                <a:spcPct val="0"/>
+              </a:spcBef>
+              <a:buNone/>
+              <a:defRPr sz="4400" kern="1200">
+                <a:solidFill>
+                  <a:schemeClr val="tx1"/>
+                </a:solidFill>
+                <a:latin typeface="+mj-lt"/>
+                <a:ea typeface="+mj-ea"/>
+                <a:cs typeface="+mj-cs"/>
+              </a:defRPr>
+            </a:lvl1pPr>
+          </a:lstStyle>
+          <a:p>
+            <a:r>
+              <a:rPr lang="es-MX" sz="6400" b="1" i="1" dirty="0"/>
+              <a:t>¿Cómo funcionan?:</a:t>
+            </a:r>
+          </a:p>
+          <a:p>
+            <a:endParaRPr lang="es-MX" dirty="0"/>
+          </a:p>
+          <a:p>
+            <a:pPr algn="just"/>
+            <a:r>
+              <a:rPr lang="es-MX" sz="6000" dirty="0"/>
+              <a:t>El enrutador descompone la consulta, invoca cero o más agentes especializados en paralelo y sintetiza los resultados en una respuesta coherente.</a:t>
+            </a:r>
+            <a:endParaRPr lang="es-CL" sz="3600" dirty="0"/>
+          </a:p>
+        </p:txBody>
+      </p:sp>
+      <p:sp>
+        <p:nvSpPr>
+          <p:cNvPr id="5" name="Título 1">
+            <a:extLst>
+              <a:ext uri="{FF2B5EF4-FFF2-40B4-BE49-F238E27FC236}">
+                <a16:creationId xmlns:a16="http://schemas.microsoft.com/office/drawing/2014/main" id="{D22D2DD8-15C4-4EC0-E9D7-70287D217F17}"/>
+              </a:ext>
+            </a:extLst>
+          </p:cNvPr>
+          <p:cNvSpPr txBox="1">
+            <a:spLocks/>
+          </p:cNvSpPr>
+          <p:nvPr/>
+        </p:nvSpPr>
+        <p:spPr>
+          <a:xfrm>
+            <a:off x="867547" y="3233373"/>
+            <a:ext cx="4455551" cy="1325563"/>
+          </a:xfrm>
+          <a:prstGeom prst="rect">
+            <a:avLst/>
+          </a:prstGeom>
+        </p:spPr>
+        <p:txBody>
+          <a:bodyPr vert="horz" lIns="91440" tIns="45720" rIns="91440" bIns="45720" rtlCol="0" anchor="ctr">
+            <a:normAutofit fontScale="25000" lnSpcReduction="20000"/>
+          </a:bodyPr>
+          <a:lstStyle>
+            <a:lvl1pPr algn="l" defTabSz="914400" rtl="0" eaLnBrk="1" latinLnBrk="0" hangingPunct="1">
+              <a:lnSpc>
+                <a:spcPct val="90000"/>
+              </a:lnSpc>
+              <a:spcBef>
+                <a:spcPct val="0"/>
+              </a:spcBef>
+              <a:buNone/>
+              <a:defRPr sz="4400" kern="1200">
+                <a:solidFill>
+                  <a:schemeClr val="tx1"/>
+                </a:solidFill>
+                <a:latin typeface="+mj-lt"/>
+                <a:ea typeface="+mj-ea"/>
+                <a:cs typeface="+mj-cs"/>
+              </a:defRPr>
+            </a:lvl1pPr>
+          </a:lstStyle>
+          <a:p>
+            <a:r>
+              <a:rPr lang="es-MX" sz="6400" b="1" i="1" dirty="0"/>
+              <a:t>Ideal:</a:t>
+            </a:r>
+          </a:p>
+          <a:p>
+            <a:endParaRPr lang="es-MX" dirty="0"/>
+          </a:p>
+          <a:p>
+            <a:pPr algn="just"/>
+            <a:r>
+              <a:rPr lang="es-MX" sz="6600" dirty="0"/>
+              <a:t>Aplicaciones con verticales distintas (dominios de conocimiento separados), escenarios que requieren consultas a múltiples fuentes en paralelo, o situaciones donde se necesita sintetizar resultados de múltiples agentes.</a:t>
+            </a:r>
+            <a:endParaRPr lang="es-CL" dirty="0"/>
+          </a:p>
+        </p:txBody>
+      </p:sp>
+      <p:sp>
+        <p:nvSpPr>
+          <p:cNvPr id="6" name="Título 1">
+            <a:extLst>
+              <a:ext uri="{FF2B5EF4-FFF2-40B4-BE49-F238E27FC236}">
+                <a16:creationId xmlns:a16="http://schemas.microsoft.com/office/drawing/2014/main" id="{18F3E939-0431-46A1-662D-6F3CB5D53C48}"/>
+              </a:ext>
+            </a:extLst>
+          </p:cNvPr>
+          <p:cNvSpPr txBox="1">
+            <a:spLocks/>
+          </p:cNvSpPr>
+          <p:nvPr/>
+        </p:nvSpPr>
+        <p:spPr>
+          <a:xfrm>
+            <a:off x="923704" y="4790113"/>
+            <a:ext cx="4324571" cy="1325563"/>
+          </a:xfrm>
+          <a:prstGeom prst="rect">
+            <a:avLst/>
+          </a:prstGeom>
+        </p:spPr>
+        <p:txBody>
+          <a:bodyPr vert="horz" lIns="91440" tIns="45720" rIns="91440" bIns="45720" rtlCol="0" anchor="ctr">
+            <a:normAutofit fontScale="92500" lnSpcReduction="10000"/>
+          </a:bodyPr>
+          <a:lstStyle>
+            <a:lvl1pPr algn="l" defTabSz="914400" rtl="0" eaLnBrk="1" latinLnBrk="0" hangingPunct="1">
+              <a:lnSpc>
+                <a:spcPct val="90000"/>
+              </a:lnSpc>
+              <a:spcBef>
+                <a:spcPct val="0"/>
+              </a:spcBef>
+              <a:buNone/>
+              <a:defRPr sz="4400" kern="1200">
+                <a:solidFill>
+                  <a:schemeClr val="tx1"/>
+                </a:solidFill>
+                <a:latin typeface="+mj-lt"/>
+                <a:ea typeface="+mj-ea"/>
+                <a:cs typeface="+mj-cs"/>
+              </a:defRPr>
+            </a:lvl1pPr>
+          </a:lstStyle>
+          <a:p>
+            <a:r>
+              <a:rPr lang="es-MX" sz="1600" b="1" i="1" dirty="0"/>
+              <a:t>¿</a:t>
+            </a:r>
+            <a:r>
+              <a:rPr lang="es-MX" sz="1600" b="1" i="1" dirty="0" err="1"/>
+              <a:t>Trade</a:t>
+            </a:r>
+            <a:r>
+              <a:rPr lang="es-MX" sz="1600" b="1" i="1" dirty="0"/>
+              <a:t>-off?:</a:t>
+            </a:r>
+          </a:p>
+          <a:p>
+            <a:endParaRPr lang="es-MX" sz="1600" b="1" i="1" dirty="0"/>
+          </a:p>
+          <a:p>
+            <a:pPr algn="just"/>
+            <a:r>
+              <a:rPr lang="es-MX" sz="1800" dirty="0"/>
+              <a:t>El diseño sin estado garantiza un rendimiento consistente por solicitud, pero genera una sobrecarga repetida de enrutamiento si se necesita historial de conversación.</a:t>
+            </a:r>
+            <a:endParaRPr lang="es-CL" sz="1600" dirty="0"/>
+          </a:p>
+        </p:txBody>
+      </p:sp>
+      <p:pic>
+        <p:nvPicPr>
+          <p:cNvPr id="10" name="Imagen 9">
+            <a:extLst>
+              <a:ext uri="{FF2B5EF4-FFF2-40B4-BE49-F238E27FC236}">
+                <a16:creationId xmlns:a16="http://schemas.microsoft.com/office/drawing/2014/main" id="{5F6E63F4-936B-4904-E139-69EDB8EE66C2}"/>
+              </a:ext>
+            </a:extLst>
+          </p:cNvPr>
+          <p:cNvPicPr>
+            <a:picLocks noChangeAspect="1"/>
+          </p:cNvPicPr>
+          <p:nvPr/>
+        </p:nvPicPr>
+        <p:blipFill>
+          <a:blip r:embed="rId4"/>
+          <a:stretch>
+            <a:fillRect/>
+          </a:stretch>
+        </p:blipFill>
+        <p:spPr>
+          <a:xfrm>
+            <a:off x="5756055" y="2935213"/>
+            <a:ext cx="5759746" cy="1390721"/>
+          </a:xfrm>
+          <a:prstGeom prst="rect">
+            <a:avLst/>
+          </a:prstGeom>
+        </p:spPr>
+      </p:pic>
+    </p:spTree>
+    <p:extLst>
+      <p:ext uri="{BB962C8B-B14F-4D97-AF65-F5344CB8AC3E}">
+        <p14:creationId xmlns:p14="http://schemas.microsoft.com/office/powerpoint/2010/main" val="101761406"/>
+      </p:ext>
+    </p:extLst>
+  </p:cSld>
+  <p:clrMapOvr>
+    <a:masterClrMapping/>
+  </p:clrMapOvr>
+</p:sld>
+</file>
+
+<file path=ppt/slides/slide11.xml><?xml version="1.0" encoding="utf-8"?>
+<p:sld xmlns:a="http://schemas.openxmlformats.org/drawingml/2006/main" xmlns:r="http://schemas.openxmlformats.org/officeDocument/2006/relationships" xmlns:p="http://schemas.openxmlformats.org/presentationml/2006/main">
+  <p:cSld>
+    <p:spTree>
+      <p:nvGrpSpPr>
+        <p:cNvPr id="1" name="">
+          <a:extLst>
+            <a:ext uri="{FF2B5EF4-FFF2-40B4-BE49-F238E27FC236}">
               <a16:creationId xmlns:a16="http://schemas.microsoft.com/office/drawing/2014/main" id="{94816531-66F4-8FD4-7690-6FF9A65CB2A8}"/>
             </a:ext>
           </a:extLst>
@@ -5346,7 +5816,7 @@
 </p:sld>
 </file>
 
-<file path=ppt/slides/slide11.xml><?xml version="1.0" encoding="utf-8"?>
+<file path=ppt/slides/slide12.xml><?xml version="1.0" encoding="utf-8"?>
 <p:sld xmlns:a="http://schemas.openxmlformats.org/drawingml/2006/main" xmlns:r="http://schemas.openxmlformats.org/officeDocument/2006/relationships" xmlns:p="http://schemas.openxmlformats.org/presentationml/2006/main">
   <p:cSld>
     <p:spTree>
@@ -5877,6 +6347,200 @@
         <p:cNvPr id="1" name="">
           <a:extLst>
             <a:ext uri="{FF2B5EF4-FFF2-40B4-BE49-F238E27FC236}">
+              <a16:creationId xmlns:a16="http://schemas.microsoft.com/office/drawing/2014/main" id="{6B444C3A-70D1-A02D-4F77-DC2A1204D005}"/>
+            </a:ext>
+          </a:extLst>
+        </p:cNvPr>
+        <p:cNvGrpSpPr/>
+        <p:nvPr/>
+      </p:nvGrpSpPr>
+      <p:grpSpPr>
+        <a:xfrm>
+          <a:off x="0" y="0"/>
+          <a:ext cx="0" cy="0"/>
+          <a:chOff x="0" y="0"/>
+          <a:chExt cx="0" cy="0"/>
+        </a:xfrm>
+      </p:grpSpPr>
+      <p:pic>
+        <p:nvPicPr>
+          <p:cNvPr id="4" name="Picture 2" descr="Duoc UC - Learn Chile">
+            <a:extLst>
+              <a:ext uri="{FF2B5EF4-FFF2-40B4-BE49-F238E27FC236}">
+                <a16:creationId xmlns:a16="http://schemas.microsoft.com/office/drawing/2014/main" id="{FE5A4F0F-F832-F504-4ADF-F16035729485}"/>
+              </a:ext>
+            </a:extLst>
+          </p:cNvPr>
+          <p:cNvPicPr>
+            <a:picLocks noChangeAspect="1" noChangeArrowheads="1"/>
+          </p:cNvPicPr>
+          <p:nvPr/>
+        </p:nvPicPr>
+        <p:blipFill>
+          <a:blip r:embed="rId2">
+            <a:extLst>
+              <a:ext uri="{28A0092B-C50C-407E-A947-70E740481C1C}">
+                <a14:useLocalDpi xmlns:a14="http://schemas.microsoft.com/office/drawing/2010/main" val="0"/>
+              </a:ext>
+            </a:extLst>
+          </a:blip>
+          <a:srcRect/>
+          <a:stretch>
+            <a:fillRect/>
+          </a:stretch>
+        </p:blipFill>
+        <p:spPr bwMode="auto">
+          <a:xfrm>
+            <a:off x="11135913" y="30480"/>
+            <a:ext cx="974807" cy="825402"/>
+          </a:xfrm>
+          <a:prstGeom prst="rect">
+            <a:avLst/>
+          </a:prstGeom>
+          <a:noFill/>
+          <a:extLst>
+            <a:ext uri="{909E8E84-426E-40DD-AFC4-6F175D3DCCD1}">
+              <a14:hiddenFill xmlns:a14="http://schemas.microsoft.com/office/drawing/2010/main">
+                <a:solidFill>
+                  <a:srgbClr val="FFFFFF"/>
+                </a:solidFill>
+              </a14:hiddenFill>
+            </a:ext>
+          </a:extLst>
+        </p:spPr>
+      </p:pic>
+      <p:sp>
+        <p:nvSpPr>
+          <p:cNvPr id="5" name="Título 1">
+            <a:extLst>
+              <a:ext uri="{FF2B5EF4-FFF2-40B4-BE49-F238E27FC236}">
+                <a16:creationId xmlns:a16="http://schemas.microsoft.com/office/drawing/2014/main" id="{6774BDCC-00B7-6150-5DB3-77DC253DF418}"/>
+              </a:ext>
+            </a:extLst>
+          </p:cNvPr>
+          <p:cNvSpPr txBox="1">
+            <a:spLocks/>
+          </p:cNvSpPr>
+          <p:nvPr/>
+        </p:nvSpPr>
+        <p:spPr>
+          <a:xfrm>
+            <a:off x="5193717" y="2309658"/>
+            <a:ext cx="6693484" cy="1325563"/>
+          </a:xfrm>
+          <a:prstGeom prst="rect">
+            <a:avLst/>
+          </a:prstGeom>
+        </p:spPr>
+        <p:txBody>
+          <a:bodyPr vert="horz" lIns="91440" tIns="45720" rIns="91440" bIns="45720" rtlCol="0" anchor="ctr">
+            <a:normAutofit fontScale="92500"/>
+          </a:bodyPr>
+          <a:lstStyle>
+            <a:lvl1pPr algn="l" defTabSz="914400" rtl="0" eaLnBrk="1" latinLnBrk="0" hangingPunct="1">
+              <a:lnSpc>
+                <a:spcPct val="90000"/>
+              </a:lnSpc>
+              <a:spcBef>
+                <a:spcPct val="0"/>
+              </a:spcBef>
+              <a:buNone/>
+              <a:defRPr sz="4400" kern="1200">
+                <a:solidFill>
+                  <a:schemeClr val="tx1"/>
+                </a:solidFill>
+                <a:latin typeface="+mj-lt"/>
+                <a:ea typeface="+mj-ea"/>
+                <a:cs typeface="+mj-cs"/>
+              </a:defRPr>
+            </a:lvl1pPr>
+          </a:lstStyle>
+          <a:p>
+            <a:pPr algn="ctr"/>
+            <a:r>
+              <a:rPr lang="es-MX" b="1" i="1" dirty="0"/>
+              <a:t>¿Quién es el?</a:t>
+            </a:r>
+          </a:p>
+          <a:p>
+            <a:r>
+              <a:rPr lang="es-CL" i="1" dirty="0" err="1"/>
+              <a:t>Jawed</a:t>
+            </a:r>
+            <a:r>
+              <a:rPr lang="es-CL" i="1" dirty="0"/>
+              <a:t> Karim</a:t>
+            </a:r>
+            <a:r>
+              <a:rPr lang="es-CL" b="1" i="1" dirty="0"/>
+              <a:t>, “</a:t>
+            </a:r>
+            <a:r>
+              <a:rPr lang="es-CL" i="1" dirty="0"/>
+              <a:t>Me at </a:t>
+            </a:r>
+            <a:r>
+              <a:rPr lang="es-CL" i="1" dirty="0" err="1"/>
+              <a:t>the</a:t>
+            </a:r>
+            <a:r>
+              <a:rPr lang="es-CL" i="1" dirty="0"/>
+              <a:t> zoo”.</a:t>
+            </a:r>
+          </a:p>
+        </p:txBody>
+      </p:sp>
+      <p:pic>
+        <p:nvPicPr>
+          <p:cNvPr id="6" name="Imagen 5">
+            <a:extLst>
+              <a:ext uri="{FF2B5EF4-FFF2-40B4-BE49-F238E27FC236}">
+                <a16:creationId xmlns:a16="http://schemas.microsoft.com/office/drawing/2014/main" id="{1F8A8766-7F02-5190-3892-AE31A73CD117}"/>
+              </a:ext>
+            </a:extLst>
+          </p:cNvPr>
+          <p:cNvPicPr>
+            <a:picLocks noChangeAspect="1"/>
+          </p:cNvPicPr>
+          <p:nvPr/>
+        </p:nvPicPr>
+        <p:blipFill>
+          <a:blip r:embed="rId3"/>
+          <a:stretch>
+            <a:fillRect/>
+          </a:stretch>
+        </p:blipFill>
+        <p:spPr>
+          <a:xfrm>
+            <a:off x="1545815" y="1246161"/>
+            <a:ext cx="3184624" cy="4522481"/>
+          </a:xfrm>
+          <a:prstGeom prst="rect">
+            <a:avLst/>
+          </a:prstGeom>
+        </p:spPr>
+      </p:pic>
+    </p:spTree>
+    <p:extLst>
+      <p:ext uri="{BB962C8B-B14F-4D97-AF65-F5344CB8AC3E}">
+        <p14:creationId xmlns:p14="http://schemas.microsoft.com/office/powerpoint/2010/main" val="652469655"/>
+      </p:ext>
+    </p:extLst>
+  </p:cSld>
+  <p:clrMapOvr>
+    <a:masterClrMapping/>
+  </p:clrMapOvr>
+</p:sld>
+</file>
+
+<file path=ppt/slides/slide4.xml><?xml version="1.0" encoding="utf-8"?>
+<p:sld xmlns:a="http://schemas.openxmlformats.org/drawingml/2006/main" xmlns:r="http://schemas.openxmlformats.org/officeDocument/2006/relationships" xmlns:p="http://schemas.openxmlformats.org/presentationml/2006/main">
+  <p:cSld>
+    <p:spTree>
+      <p:nvGrpSpPr>
+        <p:cNvPr id="1" name="">
+          <a:extLst>
+            <a:ext uri="{FF2B5EF4-FFF2-40B4-BE49-F238E27FC236}">
               <a16:creationId xmlns:a16="http://schemas.microsoft.com/office/drawing/2014/main" id="{1F17BB4E-812F-A1F1-A23F-3D337CEF5989}"/>
             </a:ext>
           </a:extLst>
@@ -6130,7 +6794,7 @@
 </p:sld>
 </file>
 
-<file path=ppt/slides/slide4.xml><?xml version="1.0" encoding="utf-8"?>
+<file path=ppt/slides/slide5.xml><?xml version="1.0" encoding="utf-8"?>
 <p:sld xmlns:a="http://schemas.openxmlformats.org/drawingml/2006/main" xmlns:r="http://schemas.openxmlformats.org/officeDocument/2006/relationships" xmlns:p="http://schemas.openxmlformats.org/presentationml/2006/main">
   <p:cSld>
     <p:spTree>
@@ -6408,7 +7072,7 @@
 </p:sld>
 </file>
 
-<file path=ppt/slides/slide5.xml><?xml version="1.0" encoding="utf-8"?>
+<file path=ppt/slides/slide6.xml><?xml version="1.0" encoding="utf-8"?>
 <p:sld xmlns:a="http://schemas.openxmlformats.org/drawingml/2006/main" xmlns:r="http://schemas.openxmlformats.org/officeDocument/2006/relationships" xmlns:p="http://schemas.openxmlformats.org/presentationml/2006/main">
   <p:cSld>
     <p:spTree>
@@ -6880,7 +7544,7 @@
 </p:sld>
 </file>
 
-<file path=ppt/slides/slide6.xml><?xml version="1.0" encoding="utf-8"?>
+<file path=ppt/slides/slide7.xml><?xml version="1.0" encoding="utf-8"?>
 <p:sld xmlns:a="http://schemas.openxmlformats.org/drawingml/2006/main" xmlns:r="http://schemas.openxmlformats.org/officeDocument/2006/relationships" xmlns:p="http://schemas.openxmlformats.org/presentationml/2006/main">
   <p:cSld>
     <p:spTree>
@@ -7354,7 +8018,7 @@
 </p:sld>
 </file>
 
-<file path=ppt/slides/slide7.xml><?xml version="1.0" encoding="utf-8"?>
+<file path=ppt/slides/slide8.xml><?xml version="1.0" encoding="utf-8"?>
 <p:sld xmlns:a="http://schemas.openxmlformats.org/drawingml/2006/main" xmlns:r="http://schemas.openxmlformats.org/officeDocument/2006/relationships" xmlns:p="http://schemas.openxmlformats.org/presentationml/2006/main">
   <p:cSld>
     <p:spTree>
@@ -7831,7 +8495,7 @@
 </p:sld>
 </file>
 
-<file path=ppt/slides/slide8.xml><?xml version="1.0" encoding="utf-8"?>
+<file path=ppt/slides/slide9.xml><?xml version="1.0" encoding="utf-8"?>
 <p:sld xmlns:a="http://schemas.openxmlformats.org/drawingml/2006/main" xmlns:r="http://schemas.openxmlformats.org/officeDocument/2006/relationships" xmlns:p="http://schemas.openxmlformats.org/presentationml/2006/main">
   <p:cSld>
     <p:spTree>
@@ -8142,475 +8806,6 @@
     <p:extLst>
       <p:ext uri="{BB962C8B-B14F-4D97-AF65-F5344CB8AC3E}">
         <p14:creationId xmlns:p14="http://schemas.microsoft.com/office/powerpoint/2010/main" val="3721893660"/>
-      </p:ext>
-    </p:extLst>
-  </p:cSld>
-  <p:clrMapOvr>
-    <a:masterClrMapping/>
-  </p:clrMapOvr>
-</p:sld>
-</file>
-
-<file path=ppt/slides/slide9.xml><?xml version="1.0" encoding="utf-8"?>
-<p:sld xmlns:a="http://schemas.openxmlformats.org/drawingml/2006/main" xmlns:r="http://schemas.openxmlformats.org/officeDocument/2006/relationships" xmlns:p="http://schemas.openxmlformats.org/presentationml/2006/main">
-  <p:cSld>
-    <p:spTree>
-      <p:nvGrpSpPr>
-        <p:cNvPr id="1" name="">
-          <a:extLst>
-            <a:ext uri="{FF2B5EF4-FFF2-40B4-BE49-F238E27FC236}">
-              <a16:creationId xmlns:a16="http://schemas.microsoft.com/office/drawing/2014/main" id="{2FE344CD-8D15-CD7A-5865-FDBFE506EAEA}"/>
-            </a:ext>
-          </a:extLst>
-        </p:cNvPr>
-        <p:cNvGrpSpPr/>
-        <p:nvPr/>
-      </p:nvGrpSpPr>
-      <p:grpSpPr>
-        <a:xfrm>
-          <a:off x="0" y="0"/>
-          <a:ext cx="0" cy="0"/>
-          <a:chOff x="0" y="0"/>
-          <a:chExt cx="0" cy="0"/>
-        </a:xfrm>
-      </p:grpSpPr>
-      <p:pic>
-        <p:nvPicPr>
-          <p:cNvPr id="4" name="Picture 2" descr="Duoc UC - Learn Chile">
-            <a:extLst>
-              <a:ext uri="{FF2B5EF4-FFF2-40B4-BE49-F238E27FC236}">
-                <a16:creationId xmlns:a16="http://schemas.microsoft.com/office/drawing/2014/main" id="{BF74DDA2-45FA-6C30-9987-5E6C88AE6452}"/>
-              </a:ext>
-            </a:extLst>
-          </p:cNvPr>
-          <p:cNvPicPr>
-            <a:picLocks noChangeAspect="1" noChangeArrowheads="1"/>
-          </p:cNvPicPr>
-          <p:nvPr/>
-        </p:nvPicPr>
-        <p:blipFill>
-          <a:blip r:embed="rId3">
-            <a:extLst>
-              <a:ext uri="{28A0092B-C50C-407E-A947-70E740481C1C}">
-                <a14:useLocalDpi xmlns:a14="http://schemas.microsoft.com/office/drawing/2010/main" val="0"/>
-              </a:ext>
-            </a:extLst>
-          </a:blip>
-          <a:srcRect/>
-          <a:stretch>
-            <a:fillRect/>
-          </a:stretch>
-        </p:blipFill>
-        <p:spPr bwMode="auto">
-          <a:xfrm>
-            <a:off x="11135913" y="30480"/>
-            <a:ext cx="974807" cy="825402"/>
-          </a:xfrm>
-          <a:prstGeom prst="rect">
-            <a:avLst/>
-          </a:prstGeom>
-          <a:noFill/>
-          <a:extLst>
-            <a:ext uri="{909E8E84-426E-40DD-AFC4-6F175D3DCCD1}">
-              <a14:hiddenFill xmlns:a14="http://schemas.microsoft.com/office/drawing/2010/main">
-                <a:solidFill>
-                  <a:srgbClr val="FFFFFF"/>
-                </a:solidFill>
-              </a14:hiddenFill>
-            </a:ext>
-          </a:extLst>
-        </p:spPr>
-      </p:pic>
-      <p:sp>
-        <p:nvSpPr>
-          <p:cNvPr id="2" name="Título 1">
-            <a:extLst>
-              <a:ext uri="{FF2B5EF4-FFF2-40B4-BE49-F238E27FC236}">
-                <a16:creationId xmlns:a16="http://schemas.microsoft.com/office/drawing/2014/main" id="{D9E673CE-F4E8-7F8B-11A6-547FC7569386}"/>
-              </a:ext>
-            </a:extLst>
-          </p:cNvPr>
-          <p:cNvSpPr txBox="1">
-            <a:spLocks/>
-          </p:cNvSpPr>
-          <p:nvPr/>
-        </p:nvSpPr>
-        <p:spPr>
-          <a:xfrm>
-            <a:off x="989606" y="284087"/>
-            <a:ext cx="9768840" cy="1325563"/>
-          </a:xfrm>
-          <a:prstGeom prst="rect">
-            <a:avLst/>
-          </a:prstGeom>
-        </p:spPr>
-        <p:txBody>
-          <a:bodyPr vert="horz" lIns="91440" tIns="45720" rIns="91440" bIns="45720" rtlCol="0" anchor="ctr">
-            <a:normAutofit/>
-          </a:bodyPr>
-          <a:lstStyle>
-            <a:lvl1pPr algn="l" defTabSz="914400" rtl="0" eaLnBrk="1" latinLnBrk="0" hangingPunct="1">
-              <a:lnSpc>
-                <a:spcPct val="90000"/>
-              </a:lnSpc>
-              <a:spcBef>
-                <a:spcPct val="0"/>
-              </a:spcBef>
-              <a:buNone/>
-              <a:defRPr sz="4400" kern="1200">
-                <a:solidFill>
-                  <a:schemeClr val="tx1"/>
-                </a:solidFill>
-                <a:latin typeface="+mj-lt"/>
-                <a:ea typeface="+mj-ea"/>
-                <a:cs typeface="+mj-cs"/>
-              </a:defRPr>
-            </a:lvl1pPr>
-          </a:lstStyle>
-          <a:p>
-            <a:endParaRPr lang="es-CL" sz="3200" i="1" dirty="0"/>
-          </a:p>
-        </p:txBody>
-      </p:sp>
-      <p:sp>
-        <p:nvSpPr>
-          <p:cNvPr id="7" name="Título 1">
-            <a:extLst>
-              <a:ext uri="{FF2B5EF4-FFF2-40B4-BE49-F238E27FC236}">
-                <a16:creationId xmlns:a16="http://schemas.microsoft.com/office/drawing/2014/main" id="{317209E0-A3EA-FBC7-1445-FF8076BB9477}"/>
-              </a:ext>
-            </a:extLst>
-          </p:cNvPr>
-          <p:cNvSpPr>
-            <a:spLocks noGrp="1"/>
-          </p:cNvSpPr>
-          <p:nvPr>
-            <p:ph type="title"/>
-          </p:nvPr>
-        </p:nvSpPr>
-        <p:spPr>
-          <a:xfrm>
-            <a:off x="498255" y="343719"/>
-            <a:ext cx="10515600" cy="1325563"/>
-          </a:xfrm>
-        </p:spPr>
-        <p:txBody>
-          <a:bodyPr/>
-          <a:lstStyle/>
-          <a:p>
-            <a:r>
-              <a:rPr lang="es-CL" b="1" i="1" dirty="0" err="1"/>
-              <a:t>Router</a:t>
-            </a:r>
-            <a:r>
-              <a:rPr lang="es-MX" b="1" i="1" dirty="0"/>
-              <a:t>: </a:t>
-            </a:r>
-            <a:r>
-              <a:rPr lang="es-MX" i="1" dirty="0"/>
-              <a:t>Dirige y ejecuta en paralelo.</a:t>
-            </a:r>
-            <a:endParaRPr lang="es-CL" i="1" dirty="0"/>
-          </a:p>
-        </p:txBody>
-      </p:sp>
-      <p:sp>
-        <p:nvSpPr>
-          <p:cNvPr id="14" name="Título 1">
-            <a:extLst>
-              <a:ext uri="{FF2B5EF4-FFF2-40B4-BE49-F238E27FC236}">
-                <a16:creationId xmlns:a16="http://schemas.microsoft.com/office/drawing/2014/main" id="{1D4AB7AB-8D14-453C-6AB8-01DC8EE227F9}"/>
-              </a:ext>
-            </a:extLst>
-          </p:cNvPr>
-          <p:cNvSpPr txBox="1">
-            <a:spLocks/>
-          </p:cNvSpPr>
-          <p:nvPr/>
-        </p:nvSpPr>
-        <p:spPr>
-          <a:xfrm>
-            <a:off x="-1256525" y="6313360"/>
-            <a:ext cx="9267049" cy="454119"/>
-          </a:xfrm>
-          <a:prstGeom prst="rect">
-            <a:avLst/>
-          </a:prstGeom>
-        </p:spPr>
-        <p:txBody>
-          <a:bodyPr vert="horz" lIns="91440" tIns="45720" rIns="91440" bIns="45720" rtlCol="0" anchor="ctr">
-            <a:normAutofit/>
-          </a:bodyPr>
-          <a:lstStyle>
-            <a:lvl1pPr algn="l" defTabSz="914400" rtl="0" eaLnBrk="1" latinLnBrk="0" hangingPunct="1">
-              <a:lnSpc>
-                <a:spcPct val="90000"/>
-              </a:lnSpc>
-              <a:spcBef>
-                <a:spcPct val="0"/>
-              </a:spcBef>
-              <a:buNone/>
-              <a:defRPr sz="4400" kern="1200">
-                <a:solidFill>
-                  <a:schemeClr val="tx1"/>
-                </a:solidFill>
-                <a:latin typeface="+mj-lt"/>
-                <a:ea typeface="+mj-ea"/>
-                <a:cs typeface="+mj-cs"/>
-              </a:defRPr>
-            </a:lvl1pPr>
-          </a:lstStyle>
-          <a:p>
-            <a:pPr algn="ctr"/>
-            <a:r>
-              <a:rPr lang="es-MX" sz="1600" b="1" i="1" dirty="0"/>
-              <a:t>Nota: </a:t>
-            </a:r>
-            <a:r>
-              <a:rPr lang="es-MX" sz="1600" i="1" dirty="0"/>
-              <a:t>https://docs.langchain.com/oss/python/langchain/multi-agent#router-4</a:t>
-            </a:r>
-            <a:endParaRPr lang="es-CL" sz="1600" i="1" dirty="0"/>
-          </a:p>
-        </p:txBody>
-      </p:sp>
-      <p:sp>
-        <p:nvSpPr>
-          <p:cNvPr id="3" name="Título 1">
-            <a:extLst>
-              <a:ext uri="{FF2B5EF4-FFF2-40B4-BE49-F238E27FC236}">
-                <a16:creationId xmlns:a16="http://schemas.microsoft.com/office/drawing/2014/main" id="{5A21F95A-FCE4-6C60-05D3-29A29C83D74B}"/>
-              </a:ext>
-            </a:extLst>
-          </p:cNvPr>
-          <p:cNvSpPr txBox="1">
-            <a:spLocks/>
-          </p:cNvSpPr>
-          <p:nvPr/>
-        </p:nvSpPr>
-        <p:spPr>
-          <a:xfrm>
-            <a:off x="867548" y="1609650"/>
-            <a:ext cx="4455551" cy="1325563"/>
-          </a:xfrm>
-          <a:prstGeom prst="rect">
-            <a:avLst/>
-          </a:prstGeom>
-        </p:spPr>
-        <p:txBody>
-          <a:bodyPr vert="horz" lIns="91440" tIns="45720" rIns="91440" bIns="45720" rtlCol="0" anchor="ctr">
-            <a:normAutofit fontScale="25000" lnSpcReduction="20000"/>
-          </a:bodyPr>
-          <a:lstStyle>
-            <a:lvl1pPr algn="l" defTabSz="914400" rtl="0" eaLnBrk="1" latinLnBrk="0" hangingPunct="1">
-              <a:lnSpc>
-                <a:spcPct val="90000"/>
-              </a:lnSpc>
-              <a:spcBef>
-                <a:spcPct val="0"/>
-              </a:spcBef>
-              <a:buNone/>
-              <a:defRPr sz="4400" kern="1200">
-                <a:solidFill>
-                  <a:schemeClr val="tx1"/>
-                </a:solidFill>
-                <a:latin typeface="+mj-lt"/>
-                <a:ea typeface="+mj-ea"/>
-                <a:cs typeface="+mj-cs"/>
-              </a:defRPr>
-            </a:lvl1pPr>
-          </a:lstStyle>
-          <a:p>
-            <a:r>
-              <a:rPr lang="es-MX" sz="6400" b="1" i="1" dirty="0"/>
-              <a:t>¿Cómo funcionan?:</a:t>
-            </a:r>
-          </a:p>
-          <a:p>
-            <a:endParaRPr lang="es-MX" dirty="0"/>
-          </a:p>
-          <a:p>
-            <a:pPr algn="just"/>
-            <a:r>
-              <a:rPr lang="es-MX" sz="6000" dirty="0"/>
-              <a:t>El enrutador descompone la consulta, invoca cero o más agentes especializados en paralelo y sintetiza los resultados en una respuesta coherente.</a:t>
-            </a:r>
-            <a:endParaRPr lang="es-CL" sz="3600" dirty="0"/>
-          </a:p>
-        </p:txBody>
-      </p:sp>
-      <p:sp>
-        <p:nvSpPr>
-          <p:cNvPr id="5" name="Título 1">
-            <a:extLst>
-              <a:ext uri="{FF2B5EF4-FFF2-40B4-BE49-F238E27FC236}">
-                <a16:creationId xmlns:a16="http://schemas.microsoft.com/office/drawing/2014/main" id="{D22D2DD8-15C4-4EC0-E9D7-70287D217F17}"/>
-              </a:ext>
-            </a:extLst>
-          </p:cNvPr>
-          <p:cNvSpPr txBox="1">
-            <a:spLocks/>
-          </p:cNvSpPr>
-          <p:nvPr/>
-        </p:nvSpPr>
-        <p:spPr>
-          <a:xfrm>
-            <a:off x="867547" y="3233373"/>
-            <a:ext cx="4455551" cy="1325563"/>
-          </a:xfrm>
-          <a:prstGeom prst="rect">
-            <a:avLst/>
-          </a:prstGeom>
-        </p:spPr>
-        <p:txBody>
-          <a:bodyPr vert="horz" lIns="91440" tIns="45720" rIns="91440" bIns="45720" rtlCol="0" anchor="ctr">
-            <a:normAutofit fontScale="25000" lnSpcReduction="20000"/>
-          </a:bodyPr>
-          <a:lstStyle>
-            <a:lvl1pPr algn="l" defTabSz="914400" rtl="0" eaLnBrk="1" latinLnBrk="0" hangingPunct="1">
-              <a:lnSpc>
-                <a:spcPct val="90000"/>
-              </a:lnSpc>
-              <a:spcBef>
-                <a:spcPct val="0"/>
-              </a:spcBef>
-              <a:buNone/>
-              <a:defRPr sz="4400" kern="1200">
-                <a:solidFill>
-                  <a:schemeClr val="tx1"/>
-                </a:solidFill>
-                <a:latin typeface="+mj-lt"/>
-                <a:ea typeface="+mj-ea"/>
-                <a:cs typeface="+mj-cs"/>
-              </a:defRPr>
-            </a:lvl1pPr>
-          </a:lstStyle>
-          <a:p>
-            <a:r>
-              <a:rPr lang="es-MX" sz="6400" b="1" i="1" dirty="0"/>
-              <a:t>Ideal:</a:t>
-            </a:r>
-          </a:p>
-          <a:p>
-            <a:endParaRPr lang="es-MX" dirty="0"/>
-          </a:p>
-          <a:p>
-            <a:pPr algn="just"/>
-            <a:r>
-              <a:rPr lang="es-MX" sz="6600" dirty="0"/>
-              <a:t>Aplicaciones con verticales distintas (dominios de conocimiento separados), escenarios que requieren consultas a múltiples fuentes en paralelo, o situaciones donde se necesita sintetizar resultados de múltiples agentes.</a:t>
-            </a:r>
-            <a:endParaRPr lang="es-CL" dirty="0"/>
-          </a:p>
-        </p:txBody>
-      </p:sp>
-      <p:sp>
-        <p:nvSpPr>
-          <p:cNvPr id="6" name="Título 1">
-            <a:extLst>
-              <a:ext uri="{FF2B5EF4-FFF2-40B4-BE49-F238E27FC236}">
-                <a16:creationId xmlns:a16="http://schemas.microsoft.com/office/drawing/2014/main" id="{18F3E939-0431-46A1-662D-6F3CB5D53C48}"/>
-              </a:ext>
-            </a:extLst>
-          </p:cNvPr>
-          <p:cNvSpPr txBox="1">
-            <a:spLocks/>
-          </p:cNvSpPr>
-          <p:nvPr/>
-        </p:nvSpPr>
-        <p:spPr>
-          <a:xfrm>
-            <a:off x="923704" y="4790113"/>
-            <a:ext cx="4324571" cy="1325563"/>
-          </a:xfrm>
-          <a:prstGeom prst="rect">
-            <a:avLst/>
-          </a:prstGeom>
-        </p:spPr>
-        <p:txBody>
-          <a:bodyPr vert="horz" lIns="91440" tIns="45720" rIns="91440" bIns="45720" rtlCol="0" anchor="ctr">
-            <a:normAutofit fontScale="92500" lnSpcReduction="10000"/>
-          </a:bodyPr>
-          <a:lstStyle>
-            <a:lvl1pPr algn="l" defTabSz="914400" rtl="0" eaLnBrk="1" latinLnBrk="0" hangingPunct="1">
-              <a:lnSpc>
-                <a:spcPct val="90000"/>
-              </a:lnSpc>
-              <a:spcBef>
-                <a:spcPct val="0"/>
-              </a:spcBef>
-              <a:buNone/>
-              <a:defRPr sz="4400" kern="1200">
-                <a:solidFill>
-                  <a:schemeClr val="tx1"/>
-                </a:solidFill>
-                <a:latin typeface="+mj-lt"/>
-                <a:ea typeface="+mj-ea"/>
-                <a:cs typeface="+mj-cs"/>
-              </a:defRPr>
-            </a:lvl1pPr>
-          </a:lstStyle>
-          <a:p>
-            <a:r>
-              <a:rPr lang="es-MX" sz="1600" b="1" i="1" dirty="0"/>
-              <a:t>¿</a:t>
-            </a:r>
-            <a:r>
-              <a:rPr lang="es-MX" sz="1600" b="1" i="1" dirty="0" err="1"/>
-              <a:t>Trade</a:t>
-            </a:r>
-            <a:r>
-              <a:rPr lang="es-MX" sz="1600" b="1" i="1" dirty="0"/>
-              <a:t>-off?:</a:t>
-            </a:r>
-          </a:p>
-          <a:p>
-            <a:endParaRPr lang="es-MX" sz="1600" b="1" i="1" dirty="0"/>
-          </a:p>
-          <a:p>
-            <a:pPr algn="just"/>
-            <a:r>
-              <a:rPr lang="es-MX" sz="1800" dirty="0"/>
-              <a:t>El diseño sin estado garantiza un rendimiento consistente por solicitud, pero genera una sobrecarga repetida de enrutamiento si se necesita historial de conversación.</a:t>
-            </a:r>
-            <a:endParaRPr lang="es-CL" sz="1600" dirty="0"/>
-          </a:p>
-        </p:txBody>
-      </p:sp>
-      <p:pic>
-        <p:nvPicPr>
-          <p:cNvPr id="10" name="Imagen 9">
-            <a:extLst>
-              <a:ext uri="{FF2B5EF4-FFF2-40B4-BE49-F238E27FC236}">
-                <a16:creationId xmlns:a16="http://schemas.microsoft.com/office/drawing/2014/main" id="{5F6E63F4-936B-4904-E139-69EDB8EE66C2}"/>
-              </a:ext>
-            </a:extLst>
-          </p:cNvPr>
-          <p:cNvPicPr>
-            <a:picLocks noChangeAspect="1"/>
-          </p:cNvPicPr>
-          <p:nvPr/>
-        </p:nvPicPr>
-        <p:blipFill>
-          <a:blip r:embed="rId4"/>
-          <a:stretch>
-            <a:fillRect/>
-          </a:stretch>
-        </p:blipFill>
-        <p:spPr>
-          <a:xfrm>
-            <a:off x="5756055" y="2935213"/>
-            <a:ext cx="5759746" cy="1390721"/>
-          </a:xfrm>
-          <a:prstGeom prst="rect">
-            <a:avLst/>
-          </a:prstGeom>
-        </p:spPr>
-      </p:pic>
-    </p:spTree>
-    <p:extLst>
-      <p:ext uri="{BB962C8B-B14F-4D97-AF65-F5344CB8AC3E}">
-        <p14:creationId xmlns:p14="http://schemas.microsoft.com/office/powerpoint/2010/main" val="101761406"/>
       </p:ext>
     </p:extLst>
   </p:cSld>

--- a/Experiencia de Aprendizaje 2 - Desarrollo de Agente Inteligentes con AI/Clase 2.4/Clase 2.4.pptx
+++ b/Experiencia de Aprendizaje 2 - Desarrollo de Agente Inteligentes con AI/Clase 2.4/Clase 2.4.pptx
@@ -5,7 +5,7 @@
     <p:sldMasterId id="2147483648" r:id="rId1"/>
   </p:sldMasterIdLst>
   <p:notesMasterIdLst>
-    <p:notesMasterId r:id="rId14"/>
+    <p:notesMasterId r:id="rId15"/>
   </p:notesMasterIdLst>
   <p:sldIdLst>
     <p:sldId id="256" r:id="rId2"/>
@@ -20,6 +20,7 @@
     <p:sldId id="300" r:id="rId11"/>
     <p:sldId id="301" r:id="rId12"/>
     <p:sldId id="302" r:id="rId13"/>
+    <p:sldId id="304" r:id="rId14"/>
   </p:sldIdLst>
   <p:sldSz cx="12192000" cy="6858000"/>
   <p:notesSz cx="6858000" cy="9144000"/>
@@ -208,7 +209,7 @@
           <a:p>
             <a:fld id="{87BDCB0C-69E9-4911-980B-989A824EA717}" type="datetimeFigureOut">
               <a:rPr lang="es-CL" smtClean="0"/>
-              <a:t>26-04-2026</a:t>
+              <a:t>28-04-2026</a:t>
             </a:fld>
             <a:endParaRPr lang="es-CL"/>
           </a:p>
@@ -591,6 +592,121 @@
 </p:notes>
 </file>
 
+<file path=ppt/notesSlides/notesSlide10.xml><?xml version="1.0" encoding="utf-8"?>
+<p:notes xmlns:a="http://schemas.openxmlformats.org/drawingml/2006/main" xmlns:r="http://schemas.openxmlformats.org/officeDocument/2006/relationships" xmlns:p="http://schemas.openxmlformats.org/presentationml/2006/main">
+  <p:cSld>
+    <p:spTree>
+      <p:nvGrpSpPr>
+        <p:cNvPr id="1" name="">
+          <a:extLst>
+            <a:ext uri="{FF2B5EF4-FFF2-40B4-BE49-F238E27FC236}">
+              <a16:creationId xmlns:a16="http://schemas.microsoft.com/office/drawing/2014/main" id="{D4546633-B348-DCC8-4F8F-2048FFC0443B}"/>
+            </a:ext>
+          </a:extLst>
+        </p:cNvPr>
+        <p:cNvGrpSpPr/>
+        <p:nvPr/>
+      </p:nvGrpSpPr>
+      <p:grpSpPr>
+        <a:xfrm>
+          <a:off x="0" y="0"/>
+          <a:ext cx="0" cy="0"/>
+          <a:chOff x="0" y="0"/>
+          <a:chExt cx="0" cy="0"/>
+        </a:xfrm>
+      </p:grpSpPr>
+      <p:sp>
+        <p:nvSpPr>
+          <p:cNvPr id="2" name="Marcador de imagen de diapositiva 1">
+            <a:extLst>
+              <a:ext uri="{FF2B5EF4-FFF2-40B4-BE49-F238E27FC236}">
+                <a16:creationId xmlns:a16="http://schemas.microsoft.com/office/drawing/2014/main" id="{04809C41-46D2-FFAA-3185-D9646AD548B9}"/>
+              </a:ext>
+            </a:extLst>
+          </p:cNvPr>
+          <p:cNvSpPr>
+            <a:spLocks noGrp="1" noRot="1" noChangeAspect="1"/>
+          </p:cNvSpPr>
+          <p:nvPr>
+            <p:ph type="sldImg"/>
+          </p:nvPr>
+        </p:nvSpPr>
+        <p:spPr/>
+        <p:txBody>
+          <a:bodyPr/>
+          <a:lstStyle/>
+          <a:p>
+            <a:endParaRPr lang="es-CL"/>
+          </a:p>
+        </p:txBody>
+      </p:sp>
+      <p:sp>
+        <p:nvSpPr>
+          <p:cNvPr id="3" name="Marcador de notas 2">
+            <a:extLst>
+              <a:ext uri="{FF2B5EF4-FFF2-40B4-BE49-F238E27FC236}">
+                <a16:creationId xmlns:a16="http://schemas.microsoft.com/office/drawing/2014/main" id="{A605D4FF-6582-091D-5513-6B71689330E0}"/>
+              </a:ext>
+            </a:extLst>
+          </p:cNvPr>
+          <p:cNvSpPr>
+            <a:spLocks noGrp="1"/>
+          </p:cNvSpPr>
+          <p:nvPr>
+            <p:ph type="body" idx="1"/>
+          </p:nvPr>
+        </p:nvSpPr>
+        <p:spPr/>
+        <p:txBody>
+          <a:bodyPr/>
+          <a:lstStyle/>
+          <a:p>
+            <a:endParaRPr lang="es-CL" dirty="0"/>
+          </a:p>
+        </p:txBody>
+      </p:sp>
+      <p:sp>
+        <p:nvSpPr>
+          <p:cNvPr id="4" name="Marcador de número de diapositiva 3">
+            <a:extLst>
+              <a:ext uri="{FF2B5EF4-FFF2-40B4-BE49-F238E27FC236}">
+                <a16:creationId xmlns:a16="http://schemas.microsoft.com/office/drawing/2014/main" id="{89264E79-DDF9-23FE-8C94-13D78F4F7C98}"/>
+              </a:ext>
+            </a:extLst>
+          </p:cNvPr>
+          <p:cNvSpPr>
+            <a:spLocks noGrp="1"/>
+          </p:cNvSpPr>
+          <p:nvPr>
+            <p:ph type="sldNum" sz="quarter" idx="5"/>
+          </p:nvPr>
+        </p:nvSpPr>
+        <p:spPr/>
+        <p:txBody>
+          <a:bodyPr/>
+          <a:lstStyle/>
+          <a:p>
+            <a:fld id="{2107F482-7FF7-4DD4-AE91-ACA70D5B43D5}" type="slidenum">
+              <a:rPr lang="es-CL" smtClean="0"/>
+              <a:t>13</a:t>
+            </a:fld>
+            <a:endParaRPr lang="es-CL"/>
+          </a:p>
+        </p:txBody>
+      </p:sp>
+    </p:spTree>
+    <p:extLst>
+      <p:ext uri="{BB962C8B-B14F-4D97-AF65-F5344CB8AC3E}">
+        <p14:creationId xmlns:p14="http://schemas.microsoft.com/office/powerpoint/2010/main" val="658234439"/>
+      </p:ext>
+    </p:extLst>
+  </p:cSld>
+  <p:clrMapOvr>
+    <a:masterClrMapping/>
+  </p:clrMapOvr>
+</p:notes>
+</file>
+
 <file path=ppt/notesSlides/notesSlide2.xml><?xml version="1.0" encoding="utf-8"?>
 <p:notes xmlns:a="http://schemas.openxmlformats.org/drawingml/2006/main" xmlns:r="http://schemas.openxmlformats.org/officeDocument/2006/relationships" xmlns:p="http://schemas.openxmlformats.org/presentationml/2006/main">
   <p:cSld>
@@ -1660,7 +1776,7 @@
           <a:p>
             <a:fld id="{E8BDA46D-A1A7-4D05-A86A-5A57D57622A5}" type="datetimeFigureOut">
               <a:rPr lang="es-CL" smtClean="0"/>
-              <a:t>26-04-2026</a:t>
+              <a:t>28-04-2026</a:t>
             </a:fld>
             <a:endParaRPr lang="es-CL"/>
           </a:p>
@@ -1860,7 +1976,7 @@
           <a:p>
             <a:fld id="{E8BDA46D-A1A7-4D05-A86A-5A57D57622A5}" type="datetimeFigureOut">
               <a:rPr lang="es-CL" smtClean="0"/>
-              <a:t>26-04-2026</a:t>
+              <a:t>28-04-2026</a:t>
             </a:fld>
             <a:endParaRPr lang="es-CL"/>
           </a:p>
@@ -2070,7 +2186,7 @@
           <a:p>
             <a:fld id="{E8BDA46D-A1A7-4D05-A86A-5A57D57622A5}" type="datetimeFigureOut">
               <a:rPr lang="es-CL" smtClean="0"/>
-              <a:t>26-04-2026</a:t>
+              <a:t>28-04-2026</a:t>
             </a:fld>
             <a:endParaRPr lang="es-CL"/>
           </a:p>
@@ -2270,7 +2386,7 @@
           <a:p>
             <a:fld id="{E8BDA46D-A1A7-4D05-A86A-5A57D57622A5}" type="datetimeFigureOut">
               <a:rPr lang="es-CL" smtClean="0"/>
-              <a:t>26-04-2026</a:t>
+              <a:t>28-04-2026</a:t>
             </a:fld>
             <a:endParaRPr lang="es-CL"/>
           </a:p>
@@ -2546,7 +2662,7 @@
           <a:p>
             <a:fld id="{E8BDA46D-A1A7-4D05-A86A-5A57D57622A5}" type="datetimeFigureOut">
               <a:rPr lang="es-CL" smtClean="0"/>
-              <a:t>26-04-2026</a:t>
+              <a:t>28-04-2026</a:t>
             </a:fld>
             <a:endParaRPr lang="es-CL"/>
           </a:p>
@@ -2814,7 +2930,7 @@
           <a:p>
             <a:fld id="{E8BDA46D-A1A7-4D05-A86A-5A57D57622A5}" type="datetimeFigureOut">
               <a:rPr lang="es-CL" smtClean="0"/>
-              <a:t>26-04-2026</a:t>
+              <a:t>28-04-2026</a:t>
             </a:fld>
             <a:endParaRPr lang="es-CL"/>
           </a:p>
@@ -3229,7 +3345,7 @@
           <a:p>
             <a:fld id="{E8BDA46D-A1A7-4D05-A86A-5A57D57622A5}" type="datetimeFigureOut">
               <a:rPr lang="es-CL" smtClean="0"/>
-              <a:t>26-04-2026</a:t>
+              <a:t>28-04-2026</a:t>
             </a:fld>
             <a:endParaRPr lang="es-CL"/>
           </a:p>
@@ -3371,7 +3487,7 @@
           <a:p>
             <a:fld id="{E8BDA46D-A1A7-4D05-A86A-5A57D57622A5}" type="datetimeFigureOut">
               <a:rPr lang="es-CL" smtClean="0"/>
-              <a:t>26-04-2026</a:t>
+              <a:t>28-04-2026</a:t>
             </a:fld>
             <a:endParaRPr lang="es-CL"/>
           </a:p>
@@ -3484,7 +3600,7 @@
           <a:p>
             <a:fld id="{E8BDA46D-A1A7-4D05-A86A-5A57D57622A5}" type="datetimeFigureOut">
               <a:rPr lang="es-CL" smtClean="0"/>
-              <a:t>26-04-2026</a:t>
+              <a:t>28-04-2026</a:t>
             </a:fld>
             <a:endParaRPr lang="es-CL"/>
           </a:p>
@@ -3797,7 +3913,7 @@
           <a:p>
             <a:fld id="{E8BDA46D-A1A7-4D05-A86A-5A57D57622A5}" type="datetimeFigureOut">
               <a:rPr lang="es-CL" smtClean="0"/>
-              <a:t>26-04-2026</a:t>
+              <a:t>28-04-2026</a:t>
             </a:fld>
             <a:endParaRPr lang="es-CL"/>
           </a:p>
@@ -4086,7 +4202,7 @@
           <a:p>
             <a:fld id="{E8BDA46D-A1A7-4D05-A86A-5A57D57622A5}" type="datetimeFigureOut">
               <a:rPr lang="es-CL" smtClean="0"/>
-              <a:t>26-04-2026</a:t>
+              <a:t>28-04-2026</a:t>
             </a:fld>
             <a:endParaRPr lang="es-CL"/>
           </a:p>
@@ -4329,7 +4445,7 @@
           <a:p>
             <a:fld id="{E8BDA46D-A1A7-4D05-A86A-5A57D57622A5}" type="datetimeFigureOut">
               <a:rPr lang="es-CL" smtClean="0"/>
-              <a:t>26-04-2026</a:t>
+              <a:t>28-04-2026</a:t>
             </a:fld>
             <a:endParaRPr lang="es-CL"/>
           </a:p>
@@ -6068,6 +6184,767 @@
     <p:extLst>
       <p:ext uri="{BB962C8B-B14F-4D97-AF65-F5344CB8AC3E}">
         <p14:creationId xmlns:p14="http://schemas.microsoft.com/office/powerpoint/2010/main" val="2933664964"/>
+      </p:ext>
+    </p:extLst>
+  </p:cSld>
+  <p:clrMapOvr>
+    <a:masterClrMapping/>
+  </p:clrMapOvr>
+</p:sld>
+</file>
+
+<file path=ppt/slides/slide13.xml><?xml version="1.0" encoding="utf-8"?>
+<p:sld xmlns:a="http://schemas.openxmlformats.org/drawingml/2006/main" xmlns:r="http://schemas.openxmlformats.org/officeDocument/2006/relationships" xmlns:p="http://schemas.openxmlformats.org/presentationml/2006/main">
+  <p:cSld>
+    <p:spTree>
+      <p:nvGrpSpPr>
+        <p:cNvPr id="1" name="">
+          <a:extLst>
+            <a:ext uri="{FF2B5EF4-FFF2-40B4-BE49-F238E27FC236}">
+              <a16:creationId xmlns:a16="http://schemas.microsoft.com/office/drawing/2014/main" id="{489F418E-12B1-CC86-9A21-29BEA99F2E83}"/>
+            </a:ext>
+          </a:extLst>
+        </p:cNvPr>
+        <p:cNvGrpSpPr/>
+        <p:nvPr/>
+      </p:nvGrpSpPr>
+      <p:grpSpPr>
+        <a:xfrm>
+          <a:off x="0" y="0"/>
+          <a:ext cx="0" cy="0"/>
+          <a:chOff x="0" y="0"/>
+          <a:chExt cx="0" cy="0"/>
+        </a:xfrm>
+      </p:grpSpPr>
+      <p:pic>
+        <p:nvPicPr>
+          <p:cNvPr id="4" name="Picture 2" descr="Duoc UC - Learn Chile">
+            <a:extLst>
+              <a:ext uri="{FF2B5EF4-FFF2-40B4-BE49-F238E27FC236}">
+                <a16:creationId xmlns:a16="http://schemas.microsoft.com/office/drawing/2014/main" id="{D6C80C9D-D129-39F8-981A-6EBE31F36E7F}"/>
+              </a:ext>
+            </a:extLst>
+          </p:cNvPr>
+          <p:cNvPicPr>
+            <a:picLocks noChangeAspect="1" noChangeArrowheads="1"/>
+          </p:cNvPicPr>
+          <p:nvPr/>
+        </p:nvPicPr>
+        <p:blipFill>
+          <a:blip r:embed="rId3">
+            <a:extLst>
+              <a:ext uri="{28A0092B-C50C-407E-A947-70E740481C1C}">
+                <a14:useLocalDpi xmlns:a14="http://schemas.microsoft.com/office/drawing/2010/main" val="0"/>
+              </a:ext>
+            </a:extLst>
+          </a:blip>
+          <a:srcRect/>
+          <a:stretch>
+            <a:fillRect/>
+          </a:stretch>
+        </p:blipFill>
+        <p:spPr bwMode="auto">
+          <a:xfrm>
+            <a:off x="11135913" y="30480"/>
+            <a:ext cx="974807" cy="825402"/>
+          </a:xfrm>
+          <a:prstGeom prst="rect">
+            <a:avLst/>
+          </a:prstGeom>
+          <a:noFill/>
+          <a:extLst>
+            <a:ext uri="{909E8E84-426E-40DD-AFC4-6F175D3DCCD1}">
+              <a14:hiddenFill xmlns:a14="http://schemas.microsoft.com/office/drawing/2010/main">
+                <a:solidFill>
+                  <a:srgbClr val="FFFFFF"/>
+                </a:solidFill>
+              </a14:hiddenFill>
+            </a:ext>
+          </a:extLst>
+        </p:spPr>
+      </p:pic>
+      <p:sp>
+        <p:nvSpPr>
+          <p:cNvPr id="7" name="Título 1">
+            <a:extLst>
+              <a:ext uri="{FF2B5EF4-FFF2-40B4-BE49-F238E27FC236}">
+                <a16:creationId xmlns:a16="http://schemas.microsoft.com/office/drawing/2014/main" id="{205D1BD5-96E1-60E4-BD67-AA71141771E5}"/>
+              </a:ext>
+            </a:extLst>
+          </p:cNvPr>
+          <p:cNvSpPr>
+            <a:spLocks noGrp="1"/>
+          </p:cNvSpPr>
+          <p:nvPr>
+            <p:ph type="title"/>
+          </p:nvPr>
+        </p:nvSpPr>
+        <p:spPr>
+          <a:xfrm>
+            <a:off x="341910" y="193100"/>
+            <a:ext cx="11508175" cy="1325563"/>
+          </a:xfrm>
+        </p:spPr>
+        <p:txBody>
+          <a:bodyPr>
+            <a:normAutofit/>
+          </a:bodyPr>
+          <a:lstStyle/>
+          <a:p>
+            <a:r>
+              <a:rPr lang="es-MX" sz="3600" b="1" i="1" dirty="0"/>
+              <a:t>Actividad 1: </a:t>
+            </a:r>
+            <a:r>
+              <a:rPr lang="es-MX" sz="3600" i="1" dirty="0"/>
+              <a:t>Nuestro mejor analista de datos.</a:t>
+            </a:r>
+            <a:endParaRPr lang="es-CL" sz="3600" i="1" dirty="0"/>
+          </a:p>
+        </p:txBody>
+      </p:sp>
+      <p:sp>
+        <p:nvSpPr>
+          <p:cNvPr id="2" name="Elipse 1">
+            <a:extLst>
+              <a:ext uri="{FF2B5EF4-FFF2-40B4-BE49-F238E27FC236}">
+                <a16:creationId xmlns:a16="http://schemas.microsoft.com/office/drawing/2014/main" id="{3B4B9558-F6B2-90A2-2148-6991CC4C4DB4}"/>
+              </a:ext>
+            </a:extLst>
+          </p:cNvPr>
+          <p:cNvSpPr/>
+          <p:nvPr/>
+        </p:nvSpPr>
+        <p:spPr>
+          <a:xfrm>
+            <a:off x="4019552" y="2766218"/>
+            <a:ext cx="1466850" cy="1325563"/>
+          </a:xfrm>
+          <a:prstGeom prst="ellipse">
+            <a:avLst/>
+          </a:prstGeom>
+          <a:solidFill>
+            <a:schemeClr val="bg1"/>
+          </a:solidFill>
+        </p:spPr>
+        <p:style>
+          <a:lnRef idx="2">
+            <a:schemeClr val="accent1">
+              <a:shade val="15000"/>
+            </a:schemeClr>
+          </a:lnRef>
+          <a:fillRef idx="1">
+            <a:schemeClr val="accent1"/>
+          </a:fillRef>
+          <a:effectRef idx="0">
+            <a:schemeClr val="accent1"/>
+          </a:effectRef>
+          <a:fontRef idx="minor">
+            <a:schemeClr val="lt1"/>
+          </a:fontRef>
+        </p:style>
+        <p:txBody>
+          <a:bodyPr rtlCol="0" anchor="ctr"/>
+          <a:lstStyle/>
+          <a:p>
+            <a:pPr algn="ctr"/>
+            <a:r>
+              <a:rPr lang="es-MX" sz="1400" dirty="0">
+                <a:solidFill>
+                  <a:schemeClr val="tx1"/>
+                </a:solidFill>
+              </a:rPr>
+              <a:t>Supervisor</a:t>
+            </a:r>
+            <a:endParaRPr lang="es-CL" sz="1400" dirty="0">
+              <a:solidFill>
+                <a:schemeClr val="tx1"/>
+              </a:solidFill>
+            </a:endParaRPr>
+          </a:p>
+        </p:txBody>
+      </p:sp>
+      <p:sp>
+        <p:nvSpPr>
+          <p:cNvPr id="3" name="Elipse 2">
+            <a:extLst>
+              <a:ext uri="{FF2B5EF4-FFF2-40B4-BE49-F238E27FC236}">
+                <a16:creationId xmlns:a16="http://schemas.microsoft.com/office/drawing/2014/main" id="{3B625017-981F-3C09-820A-9361A867AE73}"/>
+              </a:ext>
+            </a:extLst>
+          </p:cNvPr>
+          <p:cNvSpPr/>
+          <p:nvPr/>
+        </p:nvSpPr>
+        <p:spPr>
+          <a:xfrm>
+            <a:off x="7000876" y="1632743"/>
+            <a:ext cx="1466850" cy="1325563"/>
+          </a:xfrm>
+          <a:prstGeom prst="ellipse">
+            <a:avLst/>
+          </a:prstGeom>
+          <a:solidFill>
+            <a:schemeClr val="bg1"/>
+          </a:solidFill>
+        </p:spPr>
+        <p:style>
+          <a:lnRef idx="2">
+            <a:schemeClr val="accent1">
+              <a:shade val="15000"/>
+            </a:schemeClr>
+          </a:lnRef>
+          <a:fillRef idx="1">
+            <a:schemeClr val="accent1"/>
+          </a:fillRef>
+          <a:effectRef idx="0">
+            <a:schemeClr val="accent1"/>
+          </a:effectRef>
+          <a:fontRef idx="minor">
+            <a:schemeClr val="lt1"/>
+          </a:fontRef>
+        </p:style>
+        <p:txBody>
+          <a:bodyPr rtlCol="0" anchor="ctr"/>
+          <a:lstStyle/>
+          <a:p>
+            <a:pPr algn="ctr"/>
+            <a:r>
+              <a:rPr lang="es-MX" sz="1400" dirty="0">
+                <a:solidFill>
+                  <a:schemeClr val="tx1"/>
+                </a:solidFill>
+              </a:rPr>
+              <a:t>SQL Agente</a:t>
+            </a:r>
+            <a:endParaRPr lang="es-CL" sz="1400" dirty="0">
+              <a:solidFill>
+                <a:schemeClr val="tx1"/>
+              </a:solidFill>
+            </a:endParaRPr>
+          </a:p>
+        </p:txBody>
+      </p:sp>
+      <p:cxnSp>
+        <p:nvCxnSpPr>
+          <p:cNvPr id="6" name="Conector recto de flecha 5">
+            <a:extLst>
+              <a:ext uri="{FF2B5EF4-FFF2-40B4-BE49-F238E27FC236}">
+                <a16:creationId xmlns:a16="http://schemas.microsoft.com/office/drawing/2014/main" id="{CE93BB8A-1CE2-8738-A72C-B4F83E96DF98}"/>
+              </a:ext>
+            </a:extLst>
+          </p:cNvPr>
+          <p:cNvCxnSpPr>
+            <a:cxnSpLocks/>
+            <a:stCxn id="2" idx="6"/>
+          </p:cNvCxnSpPr>
+          <p:nvPr/>
+        </p:nvCxnSpPr>
+        <p:spPr>
+          <a:xfrm flipV="1">
+            <a:off x="5486402" y="2480469"/>
+            <a:ext cx="1543050" cy="948531"/>
+          </a:xfrm>
+          <a:prstGeom prst="straightConnector1">
+            <a:avLst/>
+          </a:prstGeom>
+          <a:ln>
+            <a:solidFill>
+              <a:schemeClr val="tx1"/>
+            </a:solidFill>
+            <a:tailEnd type="triangle"/>
+          </a:ln>
+        </p:spPr>
+        <p:style>
+          <a:lnRef idx="1">
+            <a:schemeClr val="accent1"/>
+          </a:lnRef>
+          <a:fillRef idx="0">
+            <a:schemeClr val="accent1"/>
+          </a:fillRef>
+          <a:effectRef idx="0">
+            <a:schemeClr val="accent1"/>
+          </a:effectRef>
+          <a:fontRef idx="minor">
+            <a:schemeClr val="tx1"/>
+          </a:fontRef>
+        </p:style>
+      </p:cxnSp>
+      <p:cxnSp>
+        <p:nvCxnSpPr>
+          <p:cNvPr id="8" name="Conector recto de flecha 7">
+            <a:extLst>
+              <a:ext uri="{FF2B5EF4-FFF2-40B4-BE49-F238E27FC236}">
+                <a16:creationId xmlns:a16="http://schemas.microsoft.com/office/drawing/2014/main" id="{74BA131C-4826-53A0-53A1-785884D4A469}"/>
+              </a:ext>
+            </a:extLst>
+          </p:cNvPr>
+          <p:cNvCxnSpPr>
+            <a:cxnSpLocks/>
+          </p:cNvCxnSpPr>
+          <p:nvPr/>
+        </p:nvCxnSpPr>
+        <p:spPr>
+          <a:xfrm>
+            <a:off x="5486402" y="3400425"/>
+            <a:ext cx="1514474" cy="725268"/>
+          </a:xfrm>
+          <a:prstGeom prst="straightConnector1">
+            <a:avLst/>
+          </a:prstGeom>
+          <a:ln>
+            <a:solidFill>
+              <a:schemeClr val="tx1"/>
+            </a:solidFill>
+            <a:tailEnd type="triangle"/>
+          </a:ln>
+        </p:spPr>
+        <p:style>
+          <a:lnRef idx="1">
+            <a:schemeClr val="accent1"/>
+          </a:lnRef>
+          <a:fillRef idx="0">
+            <a:schemeClr val="accent1"/>
+          </a:fillRef>
+          <a:effectRef idx="0">
+            <a:schemeClr val="accent1"/>
+          </a:effectRef>
+          <a:fontRef idx="minor">
+            <a:schemeClr val="tx1"/>
+          </a:fontRef>
+        </p:style>
+      </p:cxnSp>
+      <p:sp>
+        <p:nvSpPr>
+          <p:cNvPr id="15" name="Elipse 14">
+            <a:extLst>
+              <a:ext uri="{FF2B5EF4-FFF2-40B4-BE49-F238E27FC236}">
+                <a16:creationId xmlns:a16="http://schemas.microsoft.com/office/drawing/2014/main" id="{7C05BDE1-A1E9-3D56-9CE3-DDD4F4F04599}"/>
+              </a:ext>
+            </a:extLst>
+          </p:cNvPr>
+          <p:cNvSpPr/>
+          <p:nvPr/>
+        </p:nvSpPr>
+        <p:spPr>
+          <a:xfrm>
+            <a:off x="7000876" y="3613944"/>
+            <a:ext cx="1466850" cy="1325563"/>
+          </a:xfrm>
+          <a:prstGeom prst="ellipse">
+            <a:avLst/>
+          </a:prstGeom>
+          <a:solidFill>
+            <a:schemeClr val="bg1"/>
+          </a:solidFill>
+        </p:spPr>
+        <p:style>
+          <a:lnRef idx="2">
+            <a:schemeClr val="accent1">
+              <a:shade val="15000"/>
+            </a:schemeClr>
+          </a:lnRef>
+          <a:fillRef idx="1">
+            <a:schemeClr val="accent1"/>
+          </a:fillRef>
+          <a:effectRef idx="0">
+            <a:schemeClr val="accent1"/>
+          </a:effectRef>
+          <a:fontRef idx="minor">
+            <a:schemeClr val="lt1"/>
+          </a:fontRef>
+        </p:style>
+        <p:txBody>
+          <a:bodyPr rtlCol="0" anchor="ctr"/>
+          <a:lstStyle/>
+          <a:p>
+            <a:pPr algn="ctr"/>
+            <a:r>
+              <a:rPr lang="es-MX" sz="1400" dirty="0">
+                <a:solidFill>
+                  <a:schemeClr val="tx1"/>
+                </a:solidFill>
+              </a:rPr>
+              <a:t>Python Agente</a:t>
+            </a:r>
+            <a:endParaRPr lang="es-CL" sz="1400" dirty="0">
+              <a:solidFill>
+                <a:schemeClr val="tx1"/>
+              </a:solidFill>
+            </a:endParaRPr>
+          </a:p>
+        </p:txBody>
+      </p:sp>
+      <p:sp>
+        <p:nvSpPr>
+          <p:cNvPr id="16" name="Elipse 15">
+            <a:extLst>
+              <a:ext uri="{FF2B5EF4-FFF2-40B4-BE49-F238E27FC236}">
+                <a16:creationId xmlns:a16="http://schemas.microsoft.com/office/drawing/2014/main" id="{78111E89-E460-0475-06A5-067F51374165}"/>
+              </a:ext>
+            </a:extLst>
+          </p:cNvPr>
+          <p:cNvSpPr/>
+          <p:nvPr/>
+        </p:nvSpPr>
+        <p:spPr>
+          <a:xfrm>
+            <a:off x="1743077" y="2766217"/>
+            <a:ext cx="1466850" cy="1325563"/>
+          </a:xfrm>
+          <a:prstGeom prst="ellipse">
+            <a:avLst/>
+          </a:prstGeom>
+          <a:solidFill>
+            <a:schemeClr val="bg1"/>
+          </a:solidFill>
+        </p:spPr>
+        <p:style>
+          <a:lnRef idx="2">
+            <a:schemeClr val="accent1">
+              <a:shade val="15000"/>
+            </a:schemeClr>
+          </a:lnRef>
+          <a:fillRef idx="1">
+            <a:schemeClr val="accent1"/>
+          </a:fillRef>
+          <a:effectRef idx="0">
+            <a:schemeClr val="accent1"/>
+          </a:effectRef>
+          <a:fontRef idx="minor">
+            <a:schemeClr val="lt1"/>
+          </a:fontRef>
+        </p:style>
+        <p:txBody>
+          <a:bodyPr rtlCol="0" anchor="ctr"/>
+          <a:lstStyle/>
+          <a:p>
+            <a:pPr algn="ctr"/>
+            <a:r>
+              <a:rPr lang="es-MX" sz="1400" dirty="0">
+                <a:solidFill>
+                  <a:schemeClr val="tx1"/>
+                </a:solidFill>
+              </a:rPr>
+              <a:t>START</a:t>
+            </a:r>
+            <a:endParaRPr lang="es-CL" sz="1400" dirty="0">
+              <a:solidFill>
+                <a:schemeClr val="tx1"/>
+              </a:solidFill>
+            </a:endParaRPr>
+          </a:p>
+        </p:txBody>
+      </p:sp>
+      <p:cxnSp>
+        <p:nvCxnSpPr>
+          <p:cNvPr id="17" name="Conector recto de flecha 16">
+            <a:extLst>
+              <a:ext uri="{FF2B5EF4-FFF2-40B4-BE49-F238E27FC236}">
+                <a16:creationId xmlns:a16="http://schemas.microsoft.com/office/drawing/2014/main" id="{C202D526-F91D-E428-BEBA-A04B1B75F9CC}"/>
+              </a:ext>
+            </a:extLst>
+          </p:cNvPr>
+          <p:cNvCxnSpPr>
+            <a:cxnSpLocks/>
+            <a:stCxn id="16" idx="6"/>
+            <a:endCxn id="2" idx="2"/>
+          </p:cNvCxnSpPr>
+          <p:nvPr/>
+        </p:nvCxnSpPr>
+        <p:spPr>
+          <a:xfrm>
+            <a:off x="3209927" y="3428999"/>
+            <a:ext cx="809625" cy="1"/>
+          </a:xfrm>
+          <a:prstGeom prst="straightConnector1">
+            <a:avLst/>
+          </a:prstGeom>
+          <a:ln>
+            <a:solidFill>
+              <a:schemeClr val="tx1"/>
+            </a:solidFill>
+            <a:tailEnd type="triangle"/>
+          </a:ln>
+        </p:spPr>
+        <p:style>
+          <a:lnRef idx="1">
+            <a:schemeClr val="accent1"/>
+          </a:lnRef>
+          <a:fillRef idx="0">
+            <a:schemeClr val="accent1"/>
+          </a:fillRef>
+          <a:effectRef idx="0">
+            <a:schemeClr val="accent1"/>
+          </a:effectRef>
+          <a:fontRef idx="minor">
+            <a:schemeClr val="tx1"/>
+          </a:fontRef>
+        </p:style>
+      </p:cxnSp>
+      <p:cxnSp>
+        <p:nvCxnSpPr>
+          <p:cNvPr id="20" name="Conector recto de flecha 19">
+            <a:extLst>
+              <a:ext uri="{FF2B5EF4-FFF2-40B4-BE49-F238E27FC236}">
+                <a16:creationId xmlns:a16="http://schemas.microsoft.com/office/drawing/2014/main" id="{5ACB1238-0C54-58C3-AB09-C8FC1EF7EBB4}"/>
+              </a:ext>
+            </a:extLst>
+          </p:cNvPr>
+          <p:cNvCxnSpPr>
+            <a:cxnSpLocks/>
+            <a:stCxn id="2" idx="4"/>
+          </p:cNvCxnSpPr>
+          <p:nvPr/>
+        </p:nvCxnSpPr>
+        <p:spPr>
+          <a:xfrm>
+            <a:off x="4752977" y="4091781"/>
+            <a:ext cx="0" cy="847726"/>
+          </a:xfrm>
+          <a:prstGeom prst="straightConnector1">
+            <a:avLst/>
+          </a:prstGeom>
+          <a:ln>
+            <a:solidFill>
+              <a:schemeClr val="tx1"/>
+            </a:solidFill>
+            <a:tailEnd type="triangle"/>
+          </a:ln>
+        </p:spPr>
+        <p:style>
+          <a:lnRef idx="1">
+            <a:schemeClr val="accent1"/>
+          </a:lnRef>
+          <a:fillRef idx="0">
+            <a:schemeClr val="accent1"/>
+          </a:fillRef>
+          <a:effectRef idx="0">
+            <a:schemeClr val="accent1"/>
+          </a:effectRef>
+          <a:fontRef idx="minor">
+            <a:schemeClr val="tx1"/>
+          </a:fontRef>
+        </p:style>
+      </p:cxnSp>
+      <p:sp>
+        <p:nvSpPr>
+          <p:cNvPr id="24" name="Elipse 23">
+            <a:extLst>
+              <a:ext uri="{FF2B5EF4-FFF2-40B4-BE49-F238E27FC236}">
+                <a16:creationId xmlns:a16="http://schemas.microsoft.com/office/drawing/2014/main" id="{A57E53DA-B67B-F41F-42BA-876F1E0EC1D5}"/>
+              </a:ext>
+            </a:extLst>
+          </p:cNvPr>
+          <p:cNvSpPr/>
+          <p:nvPr/>
+        </p:nvSpPr>
+        <p:spPr>
+          <a:xfrm>
+            <a:off x="4019552" y="4939507"/>
+            <a:ext cx="1466850" cy="1325563"/>
+          </a:xfrm>
+          <a:prstGeom prst="ellipse">
+            <a:avLst/>
+          </a:prstGeom>
+          <a:solidFill>
+            <a:schemeClr val="bg1"/>
+          </a:solidFill>
+        </p:spPr>
+        <p:style>
+          <a:lnRef idx="2">
+            <a:schemeClr val="accent1">
+              <a:shade val="15000"/>
+            </a:schemeClr>
+          </a:lnRef>
+          <a:fillRef idx="1">
+            <a:schemeClr val="accent1"/>
+          </a:fillRef>
+          <a:effectRef idx="0">
+            <a:schemeClr val="accent1"/>
+          </a:effectRef>
+          <a:fontRef idx="minor">
+            <a:schemeClr val="lt1"/>
+          </a:fontRef>
+        </p:style>
+        <p:txBody>
+          <a:bodyPr rtlCol="0" anchor="ctr"/>
+          <a:lstStyle/>
+          <a:p>
+            <a:pPr algn="ctr"/>
+            <a:r>
+              <a:rPr lang="es-MX" sz="1400" dirty="0">
+                <a:solidFill>
+                  <a:schemeClr val="tx1"/>
+                </a:solidFill>
+              </a:rPr>
+              <a:t>END</a:t>
+            </a:r>
+            <a:endParaRPr lang="es-CL" sz="1400" dirty="0">
+              <a:solidFill>
+                <a:schemeClr val="tx1"/>
+              </a:solidFill>
+            </a:endParaRPr>
+          </a:p>
+        </p:txBody>
+      </p:sp>
+      <p:sp>
+        <p:nvSpPr>
+          <p:cNvPr id="25" name="Elipse 24">
+            <a:extLst>
+              <a:ext uri="{FF2B5EF4-FFF2-40B4-BE49-F238E27FC236}">
+                <a16:creationId xmlns:a16="http://schemas.microsoft.com/office/drawing/2014/main" id="{C3221BEF-2CB5-52E6-3FE2-167A343EF101}"/>
+              </a:ext>
+            </a:extLst>
+          </p:cNvPr>
+          <p:cNvSpPr/>
+          <p:nvPr/>
+        </p:nvSpPr>
+        <p:spPr>
+          <a:xfrm>
+            <a:off x="9505952" y="3613943"/>
+            <a:ext cx="1466850" cy="1325563"/>
+          </a:xfrm>
+          <a:prstGeom prst="ellipse">
+            <a:avLst/>
+          </a:prstGeom>
+          <a:solidFill>
+            <a:schemeClr val="bg1"/>
+          </a:solidFill>
+        </p:spPr>
+        <p:style>
+          <a:lnRef idx="2">
+            <a:schemeClr val="accent1">
+              <a:shade val="15000"/>
+            </a:schemeClr>
+          </a:lnRef>
+          <a:fillRef idx="1">
+            <a:schemeClr val="accent1"/>
+          </a:fillRef>
+          <a:effectRef idx="0">
+            <a:schemeClr val="accent1"/>
+          </a:effectRef>
+          <a:fontRef idx="minor">
+            <a:schemeClr val="lt1"/>
+          </a:fontRef>
+        </p:style>
+        <p:txBody>
+          <a:bodyPr rtlCol="0" anchor="ctr"/>
+          <a:lstStyle/>
+          <a:p>
+            <a:pPr algn="ctr"/>
+            <a:r>
+              <a:rPr lang="es-MX" sz="1400" dirty="0">
+                <a:solidFill>
+                  <a:schemeClr val="tx1"/>
+                </a:solidFill>
+              </a:rPr>
+              <a:t>END</a:t>
+            </a:r>
+            <a:endParaRPr lang="es-CL" sz="1400" dirty="0">
+              <a:solidFill>
+                <a:schemeClr val="tx1"/>
+              </a:solidFill>
+            </a:endParaRPr>
+          </a:p>
+        </p:txBody>
+      </p:sp>
+      <p:cxnSp>
+        <p:nvCxnSpPr>
+          <p:cNvPr id="26" name="Conector recto de flecha 25">
+            <a:extLst>
+              <a:ext uri="{FF2B5EF4-FFF2-40B4-BE49-F238E27FC236}">
+                <a16:creationId xmlns:a16="http://schemas.microsoft.com/office/drawing/2014/main" id="{C60283AD-FB33-0F62-1EB9-7A2C89EF37F2}"/>
+              </a:ext>
+            </a:extLst>
+          </p:cNvPr>
+          <p:cNvCxnSpPr>
+            <a:cxnSpLocks/>
+            <a:stCxn id="15" idx="6"/>
+            <a:endCxn id="25" idx="2"/>
+          </p:cNvCxnSpPr>
+          <p:nvPr/>
+        </p:nvCxnSpPr>
+        <p:spPr>
+          <a:xfrm flipV="1">
+            <a:off x="8467726" y="4276725"/>
+            <a:ext cx="1038226" cy="1"/>
+          </a:xfrm>
+          <a:prstGeom prst="straightConnector1">
+            <a:avLst/>
+          </a:prstGeom>
+          <a:ln>
+            <a:solidFill>
+              <a:schemeClr val="tx1"/>
+            </a:solidFill>
+            <a:tailEnd type="triangle"/>
+          </a:ln>
+        </p:spPr>
+        <p:style>
+          <a:lnRef idx="1">
+            <a:schemeClr val="accent1"/>
+          </a:lnRef>
+          <a:fillRef idx="0">
+            <a:schemeClr val="accent1"/>
+          </a:fillRef>
+          <a:effectRef idx="0">
+            <a:schemeClr val="accent1"/>
+          </a:effectRef>
+          <a:fontRef idx="minor">
+            <a:schemeClr val="tx1"/>
+          </a:fontRef>
+        </p:style>
+      </p:cxnSp>
+      <p:cxnSp>
+        <p:nvCxnSpPr>
+          <p:cNvPr id="29" name="Conector recto de flecha 28">
+            <a:extLst>
+              <a:ext uri="{FF2B5EF4-FFF2-40B4-BE49-F238E27FC236}">
+                <a16:creationId xmlns:a16="http://schemas.microsoft.com/office/drawing/2014/main" id="{0C3E6DB6-F5FA-3AB0-6078-2498876C6F42}"/>
+              </a:ext>
+            </a:extLst>
+          </p:cNvPr>
+          <p:cNvCxnSpPr>
+            <a:cxnSpLocks/>
+            <a:stCxn id="3" idx="4"/>
+            <a:endCxn id="15" idx="0"/>
+          </p:cNvCxnSpPr>
+          <p:nvPr/>
+        </p:nvCxnSpPr>
+        <p:spPr>
+          <a:xfrm>
+            <a:off x="7734301" y="2958306"/>
+            <a:ext cx="0" cy="655638"/>
+          </a:xfrm>
+          <a:prstGeom prst="straightConnector1">
+            <a:avLst/>
+          </a:prstGeom>
+          <a:ln>
+            <a:solidFill>
+              <a:schemeClr val="tx1"/>
+            </a:solidFill>
+            <a:tailEnd type="triangle"/>
+          </a:ln>
+        </p:spPr>
+        <p:style>
+          <a:lnRef idx="1">
+            <a:schemeClr val="accent1"/>
+          </a:lnRef>
+          <a:fillRef idx="0">
+            <a:schemeClr val="accent1"/>
+          </a:fillRef>
+          <a:effectRef idx="0">
+            <a:schemeClr val="accent1"/>
+          </a:effectRef>
+          <a:fontRef idx="minor">
+            <a:schemeClr val="tx1"/>
+          </a:fontRef>
+        </p:style>
+      </p:cxnSp>
+    </p:spTree>
+    <p:extLst>
+      <p:ext uri="{BB962C8B-B14F-4D97-AF65-F5344CB8AC3E}">
+        <p14:creationId xmlns:p14="http://schemas.microsoft.com/office/powerpoint/2010/main" val="3219028996"/>
       </p:ext>
     </p:extLst>
   </p:cSld>

--- a/Experiencia de Aprendizaje 2 - Desarrollo de Agente Inteligentes con AI/Clase 2.4/Clase 2.4.pptx
+++ b/Experiencia de Aprendizaje 2 - Desarrollo de Agente Inteligentes con AI/Clase 2.4/Clase 2.4.pptx
@@ -5,7 +5,7 @@
     <p:sldMasterId id="2147483648" r:id="rId1"/>
   </p:sldMasterIdLst>
   <p:notesMasterIdLst>
-    <p:notesMasterId r:id="rId15"/>
+    <p:notesMasterId r:id="rId16"/>
   </p:notesMasterIdLst>
   <p:sldIdLst>
     <p:sldId id="256" r:id="rId2"/>
@@ -21,6 +21,7 @@
     <p:sldId id="301" r:id="rId12"/>
     <p:sldId id="302" r:id="rId13"/>
     <p:sldId id="304" r:id="rId14"/>
+    <p:sldId id="305" r:id="rId15"/>
   </p:sldIdLst>
   <p:sldSz cx="12192000" cy="6858000"/>
   <p:notesSz cx="6858000" cy="9144000"/>
@@ -698,6 +699,121 @@
     <p:extLst>
       <p:ext uri="{BB962C8B-B14F-4D97-AF65-F5344CB8AC3E}">
         <p14:creationId xmlns:p14="http://schemas.microsoft.com/office/powerpoint/2010/main" val="658234439"/>
+      </p:ext>
+    </p:extLst>
+  </p:cSld>
+  <p:clrMapOvr>
+    <a:masterClrMapping/>
+  </p:clrMapOvr>
+</p:notes>
+</file>
+
+<file path=ppt/notesSlides/notesSlide11.xml><?xml version="1.0" encoding="utf-8"?>
+<p:notes xmlns:a="http://schemas.openxmlformats.org/drawingml/2006/main" xmlns:r="http://schemas.openxmlformats.org/officeDocument/2006/relationships" xmlns:p="http://schemas.openxmlformats.org/presentationml/2006/main">
+  <p:cSld>
+    <p:spTree>
+      <p:nvGrpSpPr>
+        <p:cNvPr id="1" name="">
+          <a:extLst>
+            <a:ext uri="{FF2B5EF4-FFF2-40B4-BE49-F238E27FC236}">
+              <a16:creationId xmlns:a16="http://schemas.microsoft.com/office/drawing/2014/main" id="{D689BD3B-C389-161C-860F-B325F9450603}"/>
+            </a:ext>
+          </a:extLst>
+        </p:cNvPr>
+        <p:cNvGrpSpPr/>
+        <p:nvPr/>
+      </p:nvGrpSpPr>
+      <p:grpSpPr>
+        <a:xfrm>
+          <a:off x="0" y="0"/>
+          <a:ext cx="0" cy="0"/>
+          <a:chOff x="0" y="0"/>
+          <a:chExt cx="0" cy="0"/>
+        </a:xfrm>
+      </p:grpSpPr>
+      <p:sp>
+        <p:nvSpPr>
+          <p:cNvPr id="2" name="Marcador de imagen de diapositiva 1">
+            <a:extLst>
+              <a:ext uri="{FF2B5EF4-FFF2-40B4-BE49-F238E27FC236}">
+                <a16:creationId xmlns:a16="http://schemas.microsoft.com/office/drawing/2014/main" id="{E4D1B762-1742-B262-CDC5-41B432047B8D}"/>
+              </a:ext>
+            </a:extLst>
+          </p:cNvPr>
+          <p:cNvSpPr>
+            <a:spLocks noGrp="1" noRot="1" noChangeAspect="1"/>
+          </p:cNvSpPr>
+          <p:nvPr>
+            <p:ph type="sldImg"/>
+          </p:nvPr>
+        </p:nvSpPr>
+        <p:spPr/>
+        <p:txBody>
+          <a:bodyPr/>
+          <a:lstStyle/>
+          <a:p>
+            <a:endParaRPr lang="es-CL"/>
+          </a:p>
+        </p:txBody>
+      </p:sp>
+      <p:sp>
+        <p:nvSpPr>
+          <p:cNvPr id="3" name="Marcador de notas 2">
+            <a:extLst>
+              <a:ext uri="{FF2B5EF4-FFF2-40B4-BE49-F238E27FC236}">
+                <a16:creationId xmlns:a16="http://schemas.microsoft.com/office/drawing/2014/main" id="{352B18B6-3EB6-C206-4491-8C41A7C5341A}"/>
+              </a:ext>
+            </a:extLst>
+          </p:cNvPr>
+          <p:cNvSpPr>
+            <a:spLocks noGrp="1"/>
+          </p:cNvSpPr>
+          <p:nvPr>
+            <p:ph type="body" idx="1"/>
+          </p:nvPr>
+        </p:nvSpPr>
+        <p:spPr/>
+        <p:txBody>
+          <a:bodyPr/>
+          <a:lstStyle/>
+          <a:p>
+            <a:endParaRPr lang="es-CL" dirty="0"/>
+          </a:p>
+        </p:txBody>
+      </p:sp>
+      <p:sp>
+        <p:nvSpPr>
+          <p:cNvPr id="4" name="Marcador de número de diapositiva 3">
+            <a:extLst>
+              <a:ext uri="{FF2B5EF4-FFF2-40B4-BE49-F238E27FC236}">
+                <a16:creationId xmlns:a16="http://schemas.microsoft.com/office/drawing/2014/main" id="{4B47B367-0D87-1177-F434-813D057010B4}"/>
+              </a:ext>
+            </a:extLst>
+          </p:cNvPr>
+          <p:cNvSpPr>
+            <a:spLocks noGrp="1"/>
+          </p:cNvSpPr>
+          <p:nvPr>
+            <p:ph type="sldNum" sz="quarter" idx="5"/>
+          </p:nvPr>
+        </p:nvSpPr>
+        <p:spPr/>
+        <p:txBody>
+          <a:bodyPr/>
+          <a:lstStyle/>
+          <a:p>
+            <a:fld id="{2107F482-7FF7-4DD4-AE91-ACA70D5B43D5}" type="slidenum">
+              <a:rPr lang="es-CL" smtClean="0"/>
+              <a:t>14</a:t>
+            </a:fld>
+            <a:endParaRPr lang="es-CL"/>
+          </a:p>
+        </p:txBody>
+      </p:sp>
+    </p:spTree>
+    <p:extLst>
+      <p:ext uri="{BB962C8B-B14F-4D97-AF65-F5344CB8AC3E}">
+        <p14:creationId xmlns:p14="http://schemas.microsoft.com/office/powerpoint/2010/main" val="1281296269"/>
       </p:ext>
     </p:extLst>
   </p:cSld>
@@ -6945,6 +7061,1000 @@
     <p:extLst>
       <p:ext uri="{BB962C8B-B14F-4D97-AF65-F5344CB8AC3E}">
         <p14:creationId xmlns:p14="http://schemas.microsoft.com/office/powerpoint/2010/main" val="3219028996"/>
+      </p:ext>
+    </p:extLst>
+  </p:cSld>
+  <p:clrMapOvr>
+    <a:masterClrMapping/>
+  </p:clrMapOvr>
+</p:sld>
+</file>
+
+<file path=ppt/slides/slide14.xml><?xml version="1.0" encoding="utf-8"?>
+<p:sld xmlns:a="http://schemas.openxmlformats.org/drawingml/2006/main" xmlns:r="http://schemas.openxmlformats.org/officeDocument/2006/relationships" xmlns:p="http://schemas.openxmlformats.org/presentationml/2006/main">
+  <p:cSld>
+    <p:spTree>
+      <p:nvGrpSpPr>
+        <p:cNvPr id="1" name="">
+          <a:extLst>
+            <a:ext uri="{FF2B5EF4-FFF2-40B4-BE49-F238E27FC236}">
+              <a16:creationId xmlns:a16="http://schemas.microsoft.com/office/drawing/2014/main" id="{E4F4C147-F5EE-5B2E-4018-23C9EA7AF943}"/>
+            </a:ext>
+          </a:extLst>
+        </p:cNvPr>
+        <p:cNvGrpSpPr/>
+        <p:nvPr/>
+      </p:nvGrpSpPr>
+      <p:grpSpPr>
+        <a:xfrm>
+          <a:off x="0" y="0"/>
+          <a:ext cx="0" cy="0"/>
+          <a:chOff x="0" y="0"/>
+          <a:chExt cx="0" cy="0"/>
+        </a:xfrm>
+      </p:grpSpPr>
+      <p:pic>
+        <p:nvPicPr>
+          <p:cNvPr id="4" name="Picture 2" descr="Duoc UC - Learn Chile">
+            <a:extLst>
+              <a:ext uri="{FF2B5EF4-FFF2-40B4-BE49-F238E27FC236}">
+                <a16:creationId xmlns:a16="http://schemas.microsoft.com/office/drawing/2014/main" id="{CF0A182C-7B7C-BF43-F203-480917E69B13}"/>
+              </a:ext>
+            </a:extLst>
+          </p:cNvPr>
+          <p:cNvPicPr>
+            <a:picLocks noChangeAspect="1" noChangeArrowheads="1"/>
+          </p:cNvPicPr>
+          <p:nvPr/>
+        </p:nvPicPr>
+        <p:blipFill>
+          <a:blip r:embed="rId3">
+            <a:extLst>
+              <a:ext uri="{28A0092B-C50C-407E-A947-70E740481C1C}">
+                <a14:useLocalDpi xmlns:a14="http://schemas.microsoft.com/office/drawing/2010/main" val="0"/>
+              </a:ext>
+            </a:extLst>
+          </a:blip>
+          <a:srcRect/>
+          <a:stretch>
+            <a:fillRect/>
+          </a:stretch>
+        </p:blipFill>
+        <p:spPr bwMode="auto">
+          <a:xfrm>
+            <a:off x="11135913" y="30480"/>
+            <a:ext cx="974807" cy="825402"/>
+          </a:xfrm>
+          <a:prstGeom prst="rect">
+            <a:avLst/>
+          </a:prstGeom>
+          <a:noFill/>
+          <a:extLst>
+            <a:ext uri="{909E8E84-426E-40DD-AFC4-6F175D3DCCD1}">
+              <a14:hiddenFill xmlns:a14="http://schemas.microsoft.com/office/drawing/2010/main">
+                <a:solidFill>
+                  <a:srgbClr val="FFFFFF"/>
+                </a:solidFill>
+              </a14:hiddenFill>
+            </a:ext>
+          </a:extLst>
+        </p:spPr>
+      </p:pic>
+      <p:sp>
+        <p:nvSpPr>
+          <p:cNvPr id="7" name="Título 1">
+            <a:extLst>
+              <a:ext uri="{FF2B5EF4-FFF2-40B4-BE49-F238E27FC236}">
+                <a16:creationId xmlns:a16="http://schemas.microsoft.com/office/drawing/2014/main" id="{B59C6DCF-5F5C-95DB-B3FC-EF1DA35BF98E}"/>
+              </a:ext>
+            </a:extLst>
+          </p:cNvPr>
+          <p:cNvSpPr>
+            <a:spLocks noGrp="1"/>
+          </p:cNvSpPr>
+          <p:nvPr>
+            <p:ph type="title"/>
+          </p:nvPr>
+        </p:nvSpPr>
+        <p:spPr>
+          <a:xfrm>
+            <a:off x="341910" y="193100"/>
+            <a:ext cx="11508175" cy="1325563"/>
+          </a:xfrm>
+        </p:spPr>
+        <p:txBody>
+          <a:bodyPr>
+            <a:normAutofit/>
+          </a:bodyPr>
+          <a:lstStyle/>
+          <a:p>
+            <a:r>
+              <a:rPr lang="es-MX" sz="3600" b="1" i="1" dirty="0"/>
+              <a:t>Actividad 1: </a:t>
+            </a:r>
+            <a:r>
+              <a:rPr lang="es-MX" sz="3600" i="1" dirty="0"/>
+              <a:t>Solución  </a:t>
+            </a:r>
+            <a:endParaRPr lang="es-CL" sz="3600" i="1" dirty="0"/>
+          </a:p>
+        </p:txBody>
+      </p:sp>
+      <p:sp>
+        <p:nvSpPr>
+          <p:cNvPr id="2" name="Elipse 1">
+            <a:extLst>
+              <a:ext uri="{FF2B5EF4-FFF2-40B4-BE49-F238E27FC236}">
+                <a16:creationId xmlns:a16="http://schemas.microsoft.com/office/drawing/2014/main" id="{49666D4A-0175-96FC-D443-34F4A0EEC9A3}"/>
+              </a:ext>
+            </a:extLst>
+          </p:cNvPr>
+          <p:cNvSpPr/>
+          <p:nvPr/>
+        </p:nvSpPr>
+        <p:spPr>
+          <a:xfrm>
+            <a:off x="4019552" y="2766218"/>
+            <a:ext cx="1466850" cy="1325563"/>
+          </a:xfrm>
+          <a:prstGeom prst="ellipse">
+            <a:avLst/>
+          </a:prstGeom>
+          <a:solidFill>
+            <a:schemeClr val="bg1"/>
+          </a:solidFill>
+        </p:spPr>
+        <p:style>
+          <a:lnRef idx="2">
+            <a:schemeClr val="accent1">
+              <a:shade val="15000"/>
+            </a:schemeClr>
+          </a:lnRef>
+          <a:fillRef idx="1">
+            <a:schemeClr val="accent1"/>
+          </a:fillRef>
+          <a:effectRef idx="0">
+            <a:schemeClr val="accent1"/>
+          </a:effectRef>
+          <a:fontRef idx="minor">
+            <a:schemeClr val="lt1"/>
+          </a:fontRef>
+        </p:style>
+        <p:txBody>
+          <a:bodyPr rtlCol="0" anchor="ctr"/>
+          <a:lstStyle/>
+          <a:p>
+            <a:pPr algn="ctr"/>
+            <a:r>
+              <a:rPr lang="es-MX" sz="1400" dirty="0">
+                <a:solidFill>
+                  <a:schemeClr val="tx1"/>
+                </a:solidFill>
+              </a:rPr>
+              <a:t>Supervisor</a:t>
+            </a:r>
+            <a:endParaRPr lang="es-CL" sz="1400" dirty="0">
+              <a:solidFill>
+                <a:schemeClr val="tx1"/>
+              </a:solidFill>
+            </a:endParaRPr>
+          </a:p>
+        </p:txBody>
+      </p:sp>
+      <p:sp>
+        <p:nvSpPr>
+          <p:cNvPr id="3" name="Elipse 2">
+            <a:extLst>
+              <a:ext uri="{FF2B5EF4-FFF2-40B4-BE49-F238E27FC236}">
+                <a16:creationId xmlns:a16="http://schemas.microsoft.com/office/drawing/2014/main" id="{5845372E-928B-0C73-6620-F3429E7A679B}"/>
+              </a:ext>
+            </a:extLst>
+          </p:cNvPr>
+          <p:cNvSpPr/>
+          <p:nvPr/>
+        </p:nvSpPr>
+        <p:spPr>
+          <a:xfrm>
+            <a:off x="7000876" y="1632743"/>
+            <a:ext cx="1466850" cy="1325563"/>
+          </a:xfrm>
+          <a:prstGeom prst="ellipse">
+            <a:avLst/>
+          </a:prstGeom>
+          <a:solidFill>
+            <a:schemeClr val="bg1"/>
+          </a:solidFill>
+        </p:spPr>
+        <p:style>
+          <a:lnRef idx="2">
+            <a:schemeClr val="accent1">
+              <a:shade val="15000"/>
+            </a:schemeClr>
+          </a:lnRef>
+          <a:fillRef idx="1">
+            <a:schemeClr val="accent1"/>
+          </a:fillRef>
+          <a:effectRef idx="0">
+            <a:schemeClr val="accent1"/>
+          </a:effectRef>
+          <a:fontRef idx="minor">
+            <a:schemeClr val="lt1"/>
+          </a:fontRef>
+        </p:style>
+        <p:txBody>
+          <a:bodyPr rtlCol="0" anchor="ctr"/>
+          <a:lstStyle/>
+          <a:p>
+            <a:pPr algn="ctr"/>
+            <a:r>
+              <a:rPr lang="es-MX" sz="1400" dirty="0">
+                <a:solidFill>
+                  <a:schemeClr val="tx1"/>
+                </a:solidFill>
+              </a:rPr>
+              <a:t>SQL Agente</a:t>
+            </a:r>
+            <a:endParaRPr lang="es-CL" sz="1400" dirty="0">
+              <a:solidFill>
+                <a:schemeClr val="tx1"/>
+              </a:solidFill>
+            </a:endParaRPr>
+          </a:p>
+        </p:txBody>
+      </p:sp>
+      <p:cxnSp>
+        <p:nvCxnSpPr>
+          <p:cNvPr id="6" name="Conector recto de flecha 5">
+            <a:extLst>
+              <a:ext uri="{FF2B5EF4-FFF2-40B4-BE49-F238E27FC236}">
+                <a16:creationId xmlns:a16="http://schemas.microsoft.com/office/drawing/2014/main" id="{16AD099B-E1DA-0AF0-3FBB-C489DBC8AC05}"/>
+              </a:ext>
+            </a:extLst>
+          </p:cNvPr>
+          <p:cNvCxnSpPr>
+            <a:cxnSpLocks/>
+            <a:stCxn id="2" idx="6"/>
+          </p:cNvCxnSpPr>
+          <p:nvPr/>
+        </p:nvCxnSpPr>
+        <p:spPr>
+          <a:xfrm flipV="1">
+            <a:off x="5486402" y="2480469"/>
+            <a:ext cx="1543050" cy="948531"/>
+          </a:xfrm>
+          <a:prstGeom prst="straightConnector1">
+            <a:avLst/>
+          </a:prstGeom>
+          <a:ln>
+            <a:solidFill>
+              <a:schemeClr val="tx1"/>
+            </a:solidFill>
+            <a:tailEnd type="triangle"/>
+          </a:ln>
+        </p:spPr>
+        <p:style>
+          <a:lnRef idx="1">
+            <a:schemeClr val="accent1"/>
+          </a:lnRef>
+          <a:fillRef idx="0">
+            <a:schemeClr val="accent1"/>
+          </a:fillRef>
+          <a:effectRef idx="0">
+            <a:schemeClr val="accent1"/>
+          </a:effectRef>
+          <a:fontRef idx="minor">
+            <a:schemeClr val="tx1"/>
+          </a:fontRef>
+        </p:style>
+      </p:cxnSp>
+      <p:cxnSp>
+        <p:nvCxnSpPr>
+          <p:cNvPr id="8" name="Conector recto de flecha 7">
+            <a:extLst>
+              <a:ext uri="{FF2B5EF4-FFF2-40B4-BE49-F238E27FC236}">
+                <a16:creationId xmlns:a16="http://schemas.microsoft.com/office/drawing/2014/main" id="{EBE3919C-6F38-FED1-D291-C84E19B6B061}"/>
+              </a:ext>
+            </a:extLst>
+          </p:cNvPr>
+          <p:cNvCxnSpPr>
+            <a:cxnSpLocks/>
+          </p:cNvCxnSpPr>
+          <p:nvPr/>
+        </p:nvCxnSpPr>
+        <p:spPr>
+          <a:xfrm>
+            <a:off x="5486402" y="3400425"/>
+            <a:ext cx="1514474" cy="725268"/>
+          </a:xfrm>
+          <a:prstGeom prst="straightConnector1">
+            <a:avLst/>
+          </a:prstGeom>
+          <a:ln>
+            <a:solidFill>
+              <a:schemeClr val="tx1"/>
+            </a:solidFill>
+            <a:tailEnd type="triangle"/>
+          </a:ln>
+        </p:spPr>
+        <p:style>
+          <a:lnRef idx="1">
+            <a:schemeClr val="accent1"/>
+          </a:lnRef>
+          <a:fillRef idx="0">
+            <a:schemeClr val="accent1"/>
+          </a:fillRef>
+          <a:effectRef idx="0">
+            <a:schemeClr val="accent1"/>
+          </a:effectRef>
+          <a:fontRef idx="minor">
+            <a:schemeClr val="tx1"/>
+          </a:fontRef>
+        </p:style>
+      </p:cxnSp>
+      <p:sp>
+        <p:nvSpPr>
+          <p:cNvPr id="15" name="Elipse 14">
+            <a:extLst>
+              <a:ext uri="{FF2B5EF4-FFF2-40B4-BE49-F238E27FC236}">
+                <a16:creationId xmlns:a16="http://schemas.microsoft.com/office/drawing/2014/main" id="{1705F4D9-65F6-F6AA-E641-C017BE4E9D7F}"/>
+              </a:ext>
+            </a:extLst>
+          </p:cNvPr>
+          <p:cNvSpPr/>
+          <p:nvPr/>
+        </p:nvSpPr>
+        <p:spPr>
+          <a:xfrm>
+            <a:off x="7000876" y="3613944"/>
+            <a:ext cx="1466850" cy="1325563"/>
+          </a:xfrm>
+          <a:prstGeom prst="ellipse">
+            <a:avLst/>
+          </a:prstGeom>
+          <a:solidFill>
+            <a:schemeClr val="bg1"/>
+          </a:solidFill>
+        </p:spPr>
+        <p:style>
+          <a:lnRef idx="2">
+            <a:schemeClr val="accent1">
+              <a:shade val="15000"/>
+            </a:schemeClr>
+          </a:lnRef>
+          <a:fillRef idx="1">
+            <a:schemeClr val="accent1"/>
+          </a:fillRef>
+          <a:effectRef idx="0">
+            <a:schemeClr val="accent1"/>
+          </a:effectRef>
+          <a:fontRef idx="minor">
+            <a:schemeClr val="lt1"/>
+          </a:fontRef>
+        </p:style>
+        <p:txBody>
+          <a:bodyPr rtlCol="0" anchor="ctr"/>
+          <a:lstStyle/>
+          <a:p>
+            <a:pPr algn="ctr"/>
+            <a:r>
+              <a:rPr lang="es-MX" sz="1400" dirty="0">
+                <a:solidFill>
+                  <a:schemeClr val="tx1"/>
+                </a:solidFill>
+              </a:rPr>
+              <a:t>Python Agente</a:t>
+            </a:r>
+            <a:endParaRPr lang="es-CL" sz="1400" dirty="0">
+              <a:solidFill>
+                <a:schemeClr val="tx1"/>
+              </a:solidFill>
+            </a:endParaRPr>
+          </a:p>
+        </p:txBody>
+      </p:sp>
+      <p:sp>
+        <p:nvSpPr>
+          <p:cNvPr id="16" name="Elipse 15">
+            <a:extLst>
+              <a:ext uri="{FF2B5EF4-FFF2-40B4-BE49-F238E27FC236}">
+                <a16:creationId xmlns:a16="http://schemas.microsoft.com/office/drawing/2014/main" id="{BAF7092E-0300-444C-9D1A-FA7A6CC00EC2}"/>
+              </a:ext>
+            </a:extLst>
+          </p:cNvPr>
+          <p:cNvSpPr/>
+          <p:nvPr/>
+        </p:nvSpPr>
+        <p:spPr>
+          <a:xfrm>
+            <a:off x="1743077" y="2766217"/>
+            <a:ext cx="1466850" cy="1325563"/>
+          </a:xfrm>
+          <a:prstGeom prst="ellipse">
+            <a:avLst/>
+          </a:prstGeom>
+          <a:solidFill>
+            <a:schemeClr val="bg1"/>
+          </a:solidFill>
+        </p:spPr>
+        <p:style>
+          <a:lnRef idx="2">
+            <a:schemeClr val="accent1">
+              <a:shade val="15000"/>
+            </a:schemeClr>
+          </a:lnRef>
+          <a:fillRef idx="1">
+            <a:schemeClr val="accent1"/>
+          </a:fillRef>
+          <a:effectRef idx="0">
+            <a:schemeClr val="accent1"/>
+          </a:effectRef>
+          <a:fontRef idx="minor">
+            <a:schemeClr val="lt1"/>
+          </a:fontRef>
+        </p:style>
+        <p:txBody>
+          <a:bodyPr rtlCol="0" anchor="ctr"/>
+          <a:lstStyle/>
+          <a:p>
+            <a:pPr algn="ctr"/>
+            <a:r>
+              <a:rPr lang="es-MX" sz="1400" dirty="0">
+                <a:solidFill>
+                  <a:schemeClr val="tx1"/>
+                </a:solidFill>
+              </a:rPr>
+              <a:t>START</a:t>
+            </a:r>
+            <a:endParaRPr lang="es-CL" sz="1400" dirty="0">
+              <a:solidFill>
+                <a:schemeClr val="tx1"/>
+              </a:solidFill>
+            </a:endParaRPr>
+          </a:p>
+        </p:txBody>
+      </p:sp>
+      <p:cxnSp>
+        <p:nvCxnSpPr>
+          <p:cNvPr id="17" name="Conector recto de flecha 16">
+            <a:extLst>
+              <a:ext uri="{FF2B5EF4-FFF2-40B4-BE49-F238E27FC236}">
+                <a16:creationId xmlns:a16="http://schemas.microsoft.com/office/drawing/2014/main" id="{35D84396-F6EC-7B04-9F18-400E46334783}"/>
+              </a:ext>
+            </a:extLst>
+          </p:cNvPr>
+          <p:cNvCxnSpPr>
+            <a:cxnSpLocks/>
+            <a:stCxn id="16" idx="6"/>
+            <a:endCxn id="2" idx="2"/>
+          </p:cNvCxnSpPr>
+          <p:nvPr/>
+        </p:nvCxnSpPr>
+        <p:spPr>
+          <a:xfrm>
+            <a:off x="3209927" y="3428999"/>
+            <a:ext cx="809625" cy="1"/>
+          </a:xfrm>
+          <a:prstGeom prst="straightConnector1">
+            <a:avLst/>
+          </a:prstGeom>
+          <a:ln>
+            <a:solidFill>
+              <a:schemeClr val="tx1"/>
+            </a:solidFill>
+            <a:tailEnd type="triangle"/>
+          </a:ln>
+        </p:spPr>
+        <p:style>
+          <a:lnRef idx="1">
+            <a:schemeClr val="accent1"/>
+          </a:lnRef>
+          <a:fillRef idx="0">
+            <a:schemeClr val="accent1"/>
+          </a:fillRef>
+          <a:effectRef idx="0">
+            <a:schemeClr val="accent1"/>
+          </a:effectRef>
+          <a:fontRef idx="minor">
+            <a:schemeClr val="tx1"/>
+          </a:fontRef>
+        </p:style>
+      </p:cxnSp>
+      <p:cxnSp>
+        <p:nvCxnSpPr>
+          <p:cNvPr id="20" name="Conector recto de flecha 19">
+            <a:extLst>
+              <a:ext uri="{FF2B5EF4-FFF2-40B4-BE49-F238E27FC236}">
+                <a16:creationId xmlns:a16="http://schemas.microsoft.com/office/drawing/2014/main" id="{3F2E0450-61EB-E8BA-1CDC-B260BF9803C3}"/>
+              </a:ext>
+            </a:extLst>
+          </p:cNvPr>
+          <p:cNvCxnSpPr>
+            <a:cxnSpLocks/>
+            <a:stCxn id="2" idx="4"/>
+          </p:cNvCxnSpPr>
+          <p:nvPr/>
+        </p:nvCxnSpPr>
+        <p:spPr>
+          <a:xfrm>
+            <a:off x="4752977" y="4091781"/>
+            <a:ext cx="0" cy="847726"/>
+          </a:xfrm>
+          <a:prstGeom prst="straightConnector1">
+            <a:avLst/>
+          </a:prstGeom>
+          <a:ln>
+            <a:solidFill>
+              <a:schemeClr val="tx1"/>
+            </a:solidFill>
+            <a:tailEnd type="triangle"/>
+          </a:ln>
+        </p:spPr>
+        <p:style>
+          <a:lnRef idx="1">
+            <a:schemeClr val="accent1"/>
+          </a:lnRef>
+          <a:fillRef idx="0">
+            <a:schemeClr val="accent1"/>
+          </a:fillRef>
+          <a:effectRef idx="0">
+            <a:schemeClr val="accent1"/>
+          </a:effectRef>
+          <a:fontRef idx="minor">
+            <a:schemeClr val="tx1"/>
+          </a:fontRef>
+        </p:style>
+      </p:cxnSp>
+      <p:sp>
+        <p:nvSpPr>
+          <p:cNvPr id="24" name="Elipse 23">
+            <a:extLst>
+              <a:ext uri="{FF2B5EF4-FFF2-40B4-BE49-F238E27FC236}">
+                <a16:creationId xmlns:a16="http://schemas.microsoft.com/office/drawing/2014/main" id="{4C3F9981-A5B8-B93E-D659-A127231DB10E}"/>
+              </a:ext>
+            </a:extLst>
+          </p:cNvPr>
+          <p:cNvSpPr/>
+          <p:nvPr/>
+        </p:nvSpPr>
+        <p:spPr>
+          <a:xfrm>
+            <a:off x="4019552" y="4939507"/>
+            <a:ext cx="1466850" cy="1325563"/>
+          </a:xfrm>
+          <a:prstGeom prst="ellipse">
+            <a:avLst/>
+          </a:prstGeom>
+          <a:solidFill>
+            <a:schemeClr val="bg1"/>
+          </a:solidFill>
+        </p:spPr>
+        <p:style>
+          <a:lnRef idx="2">
+            <a:schemeClr val="accent1">
+              <a:shade val="15000"/>
+            </a:schemeClr>
+          </a:lnRef>
+          <a:fillRef idx="1">
+            <a:schemeClr val="accent1"/>
+          </a:fillRef>
+          <a:effectRef idx="0">
+            <a:schemeClr val="accent1"/>
+          </a:effectRef>
+          <a:fontRef idx="minor">
+            <a:schemeClr val="lt1"/>
+          </a:fontRef>
+        </p:style>
+        <p:txBody>
+          <a:bodyPr rtlCol="0" anchor="ctr"/>
+          <a:lstStyle/>
+          <a:p>
+            <a:pPr algn="ctr"/>
+            <a:r>
+              <a:rPr lang="es-MX" sz="1400" dirty="0">
+                <a:solidFill>
+                  <a:schemeClr val="tx1"/>
+                </a:solidFill>
+              </a:rPr>
+              <a:t>END</a:t>
+            </a:r>
+            <a:endParaRPr lang="es-CL" sz="1400" dirty="0">
+              <a:solidFill>
+                <a:schemeClr val="tx1"/>
+              </a:solidFill>
+            </a:endParaRPr>
+          </a:p>
+        </p:txBody>
+      </p:sp>
+      <p:sp>
+        <p:nvSpPr>
+          <p:cNvPr id="25" name="Elipse 24">
+            <a:extLst>
+              <a:ext uri="{FF2B5EF4-FFF2-40B4-BE49-F238E27FC236}">
+                <a16:creationId xmlns:a16="http://schemas.microsoft.com/office/drawing/2014/main" id="{3195B407-400A-C7AD-8E4B-44B1365781DA}"/>
+              </a:ext>
+            </a:extLst>
+          </p:cNvPr>
+          <p:cNvSpPr/>
+          <p:nvPr/>
+        </p:nvSpPr>
+        <p:spPr>
+          <a:xfrm>
+            <a:off x="9505952" y="3613943"/>
+            <a:ext cx="1466850" cy="1325563"/>
+          </a:xfrm>
+          <a:prstGeom prst="ellipse">
+            <a:avLst/>
+          </a:prstGeom>
+          <a:solidFill>
+            <a:schemeClr val="bg1"/>
+          </a:solidFill>
+        </p:spPr>
+        <p:style>
+          <a:lnRef idx="2">
+            <a:schemeClr val="accent1">
+              <a:shade val="15000"/>
+            </a:schemeClr>
+          </a:lnRef>
+          <a:fillRef idx="1">
+            <a:schemeClr val="accent1"/>
+          </a:fillRef>
+          <a:effectRef idx="0">
+            <a:schemeClr val="accent1"/>
+          </a:effectRef>
+          <a:fontRef idx="minor">
+            <a:schemeClr val="lt1"/>
+          </a:fontRef>
+        </p:style>
+        <p:txBody>
+          <a:bodyPr rtlCol="0" anchor="ctr"/>
+          <a:lstStyle/>
+          <a:p>
+            <a:pPr algn="ctr"/>
+            <a:r>
+              <a:rPr lang="es-MX" sz="1400" dirty="0">
+                <a:solidFill>
+                  <a:schemeClr val="tx1"/>
+                </a:solidFill>
+              </a:rPr>
+              <a:t>END</a:t>
+            </a:r>
+            <a:endParaRPr lang="es-CL" sz="1400" dirty="0">
+              <a:solidFill>
+                <a:schemeClr val="tx1"/>
+              </a:solidFill>
+            </a:endParaRPr>
+          </a:p>
+        </p:txBody>
+      </p:sp>
+      <p:cxnSp>
+        <p:nvCxnSpPr>
+          <p:cNvPr id="26" name="Conector recto de flecha 25">
+            <a:extLst>
+              <a:ext uri="{FF2B5EF4-FFF2-40B4-BE49-F238E27FC236}">
+                <a16:creationId xmlns:a16="http://schemas.microsoft.com/office/drawing/2014/main" id="{4912AB19-0074-57CD-4C54-D097C2BF1BB0}"/>
+              </a:ext>
+            </a:extLst>
+          </p:cNvPr>
+          <p:cNvCxnSpPr>
+            <a:cxnSpLocks/>
+            <a:stCxn id="15" idx="6"/>
+            <a:endCxn id="25" idx="2"/>
+          </p:cNvCxnSpPr>
+          <p:nvPr/>
+        </p:nvCxnSpPr>
+        <p:spPr>
+          <a:xfrm flipV="1">
+            <a:off x="8467726" y="4276725"/>
+            <a:ext cx="1038226" cy="1"/>
+          </a:xfrm>
+          <a:prstGeom prst="straightConnector1">
+            <a:avLst/>
+          </a:prstGeom>
+          <a:ln>
+            <a:solidFill>
+              <a:schemeClr val="tx1"/>
+            </a:solidFill>
+            <a:tailEnd type="triangle"/>
+          </a:ln>
+        </p:spPr>
+        <p:style>
+          <a:lnRef idx="1">
+            <a:schemeClr val="accent1"/>
+          </a:lnRef>
+          <a:fillRef idx="0">
+            <a:schemeClr val="accent1"/>
+          </a:fillRef>
+          <a:effectRef idx="0">
+            <a:schemeClr val="accent1"/>
+          </a:effectRef>
+          <a:fontRef idx="minor">
+            <a:schemeClr val="tx1"/>
+          </a:fontRef>
+        </p:style>
+      </p:cxnSp>
+      <p:cxnSp>
+        <p:nvCxnSpPr>
+          <p:cNvPr id="29" name="Conector recto de flecha 28">
+            <a:extLst>
+              <a:ext uri="{FF2B5EF4-FFF2-40B4-BE49-F238E27FC236}">
+                <a16:creationId xmlns:a16="http://schemas.microsoft.com/office/drawing/2014/main" id="{3FB2EAC5-8778-3FF3-4C75-263458A5BBEC}"/>
+              </a:ext>
+            </a:extLst>
+          </p:cNvPr>
+          <p:cNvCxnSpPr>
+            <a:cxnSpLocks/>
+            <a:stCxn id="3" idx="4"/>
+            <a:endCxn id="15" idx="0"/>
+          </p:cNvCxnSpPr>
+          <p:nvPr/>
+        </p:nvCxnSpPr>
+        <p:spPr>
+          <a:xfrm>
+            <a:off x="7734301" y="2958306"/>
+            <a:ext cx="0" cy="655638"/>
+          </a:xfrm>
+          <a:prstGeom prst="straightConnector1">
+            <a:avLst/>
+          </a:prstGeom>
+          <a:ln>
+            <a:solidFill>
+              <a:schemeClr val="tx1"/>
+            </a:solidFill>
+            <a:tailEnd type="triangle"/>
+          </a:ln>
+        </p:spPr>
+        <p:style>
+          <a:lnRef idx="1">
+            <a:schemeClr val="accent1"/>
+          </a:lnRef>
+          <a:fillRef idx="0">
+            <a:schemeClr val="accent1"/>
+          </a:fillRef>
+          <a:effectRef idx="0">
+            <a:schemeClr val="accent1"/>
+          </a:effectRef>
+          <a:fontRef idx="minor">
+            <a:schemeClr val="tx1"/>
+          </a:fontRef>
+        </p:style>
+      </p:cxnSp>
+      <p:cxnSp>
+        <p:nvCxnSpPr>
+          <p:cNvPr id="5" name="Conector recto de flecha 4">
+            <a:extLst>
+              <a:ext uri="{FF2B5EF4-FFF2-40B4-BE49-F238E27FC236}">
+                <a16:creationId xmlns:a16="http://schemas.microsoft.com/office/drawing/2014/main" id="{19B58268-8069-7BE0-0020-7E75D5E8855E}"/>
+              </a:ext>
+            </a:extLst>
+          </p:cNvPr>
+          <p:cNvCxnSpPr>
+            <a:cxnSpLocks/>
+          </p:cNvCxnSpPr>
+          <p:nvPr/>
+        </p:nvCxnSpPr>
+        <p:spPr>
+          <a:xfrm flipV="1">
+            <a:off x="4781553" y="2366388"/>
+            <a:ext cx="0" cy="399829"/>
+          </a:xfrm>
+          <a:prstGeom prst="straightConnector1">
+            <a:avLst/>
+          </a:prstGeom>
+          <a:ln>
+            <a:solidFill>
+              <a:srgbClr val="C00000"/>
+            </a:solidFill>
+            <a:tailEnd type="triangle"/>
+          </a:ln>
+        </p:spPr>
+        <p:style>
+          <a:lnRef idx="1">
+            <a:schemeClr val="accent1"/>
+          </a:lnRef>
+          <a:fillRef idx="0">
+            <a:schemeClr val="accent1"/>
+          </a:fillRef>
+          <a:effectRef idx="0">
+            <a:schemeClr val="accent1"/>
+          </a:effectRef>
+          <a:fontRef idx="minor">
+            <a:schemeClr val="tx1"/>
+          </a:fontRef>
+        </p:style>
+      </p:cxnSp>
+      <p:sp>
+        <p:nvSpPr>
+          <p:cNvPr id="11" name="Elipse 10">
+            <a:extLst>
+              <a:ext uri="{FF2B5EF4-FFF2-40B4-BE49-F238E27FC236}">
+                <a16:creationId xmlns:a16="http://schemas.microsoft.com/office/drawing/2014/main" id="{9320EE33-500C-46F1-2EE1-87FB4A4B6CEA}"/>
+              </a:ext>
+            </a:extLst>
+          </p:cNvPr>
+          <p:cNvSpPr/>
+          <p:nvPr/>
+        </p:nvSpPr>
+        <p:spPr>
+          <a:xfrm>
+            <a:off x="3981452" y="1410780"/>
+            <a:ext cx="1543050" cy="948531"/>
+          </a:xfrm>
+          <a:prstGeom prst="ellipse">
+            <a:avLst/>
+          </a:prstGeom>
+          <a:solidFill>
+            <a:schemeClr val="bg1"/>
+          </a:solidFill>
+          <a:ln>
+            <a:solidFill>
+              <a:srgbClr val="C00000"/>
+            </a:solidFill>
+          </a:ln>
+        </p:spPr>
+        <p:style>
+          <a:lnRef idx="2">
+            <a:schemeClr val="accent1">
+              <a:shade val="15000"/>
+            </a:schemeClr>
+          </a:lnRef>
+          <a:fillRef idx="1">
+            <a:schemeClr val="accent1"/>
+          </a:fillRef>
+          <a:effectRef idx="0">
+            <a:schemeClr val="accent1"/>
+          </a:effectRef>
+          <a:fontRef idx="minor">
+            <a:schemeClr val="lt1"/>
+          </a:fontRef>
+        </p:style>
+        <p:txBody>
+          <a:bodyPr rtlCol="0" anchor="ctr"/>
+          <a:lstStyle/>
+          <a:p>
+            <a:pPr algn="ctr"/>
+            <a:r>
+              <a:rPr lang="es-MX" sz="1400" dirty="0">
+                <a:solidFill>
+                  <a:srgbClr val="FF0000"/>
+                </a:solidFill>
+              </a:rPr>
+              <a:t>Agente</a:t>
+            </a:r>
+          </a:p>
+          <a:p>
+            <a:pPr algn="ctr"/>
+            <a:r>
+              <a:rPr lang="es-MX" sz="1400" dirty="0" err="1">
+                <a:solidFill>
+                  <a:srgbClr val="FF0000"/>
+                </a:solidFill>
+              </a:rPr>
+              <a:t>Reporteria</a:t>
+            </a:r>
+            <a:endParaRPr lang="es-CL" sz="1400" dirty="0">
+              <a:solidFill>
+                <a:srgbClr val="FF0000"/>
+              </a:solidFill>
+            </a:endParaRPr>
+          </a:p>
+        </p:txBody>
+      </p:sp>
+      <p:sp>
+        <p:nvSpPr>
+          <p:cNvPr id="12" name="Elipse 11">
+            <a:extLst>
+              <a:ext uri="{FF2B5EF4-FFF2-40B4-BE49-F238E27FC236}">
+                <a16:creationId xmlns:a16="http://schemas.microsoft.com/office/drawing/2014/main" id="{5ADCA154-60E2-84D9-7B34-6AE031F25182}"/>
+              </a:ext>
+            </a:extLst>
+          </p:cNvPr>
+          <p:cNvSpPr/>
+          <p:nvPr/>
+        </p:nvSpPr>
+        <p:spPr>
+          <a:xfrm>
+            <a:off x="2405064" y="1488219"/>
+            <a:ext cx="838201" cy="785697"/>
+          </a:xfrm>
+          <a:prstGeom prst="ellipse">
+            <a:avLst/>
+          </a:prstGeom>
+          <a:solidFill>
+            <a:schemeClr val="bg1"/>
+          </a:solidFill>
+          <a:ln>
+            <a:solidFill>
+              <a:srgbClr val="C00000"/>
+            </a:solidFill>
+          </a:ln>
+        </p:spPr>
+        <p:style>
+          <a:lnRef idx="2">
+            <a:schemeClr val="accent1">
+              <a:shade val="15000"/>
+            </a:schemeClr>
+          </a:lnRef>
+          <a:fillRef idx="1">
+            <a:schemeClr val="accent1"/>
+          </a:fillRef>
+          <a:effectRef idx="0">
+            <a:schemeClr val="accent1"/>
+          </a:effectRef>
+          <a:fontRef idx="minor">
+            <a:schemeClr val="lt1"/>
+          </a:fontRef>
+        </p:style>
+        <p:txBody>
+          <a:bodyPr rtlCol="0" anchor="ctr"/>
+          <a:lstStyle/>
+          <a:p>
+            <a:pPr algn="ctr"/>
+            <a:r>
+              <a:rPr lang="es-MX" sz="1400" dirty="0">
+                <a:solidFill>
+                  <a:srgbClr val="FF0000"/>
+                </a:solidFill>
+              </a:rPr>
+              <a:t>END</a:t>
+            </a:r>
+            <a:endParaRPr lang="es-CL" sz="1400" dirty="0">
+              <a:solidFill>
+                <a:srgbClr val="FF0000"/>
+              </a:solidFill>
+            </a:endParaRPr>
+          </a:p>
+        </p:txBody>
+      </p:sp>
+      <p:cxnSp>
+        <p:nvCxnSpPr>
+          <p:cNvPr id="13" name="Conector recto de flecha 12">
+            <a:extLst>
+              <a:ext uri="{FF2B5EF4-FFF2-40B4-BE49-F238E27FC236}">
+                <a16:creationId xmlns:a16="http://schemas.microsoft.com/office/drawing/2014/main" id="{203D7F96-2A0C-5A68-CCF1-9EA9F6841505}"/>
+              </a:ext>
+            </a:extLst>
+          </p:cNvPr>
+          <p:cNvCxnSpPr>
+            <a:cxnSpLocks/>
+            <a:stCxn id="11" idx="2"/>
+            <a:endCxn id="12" idx="6"/>
+          </p:cNvCxnSpPr>
+          <p:nvPr/>
+        </p:nvCxnSpPr>
+        <p:spPr>
+          <a:xfrm flipH="1" flipV="1">
+            <a:off x="3243265" y="1881068"/>
+            <a:ext cx="738187" cy="3978"/>
+          </a:xfrm>
+          <a:prstGeom prst="straightConnector1">
+            <a:avLst/>
+          </a:prstGeom>
+          <a:ln>
+            <a:solidFill>
+              <a:srgbClr val="C00000"/>
+            </a:solidFill>
+            <a:tailEnd type="triangle"/>
+          </a:ln>
+        </p:spPr>
+        <p:style>
+          <a:lnRef idx="1">
+            <a:schemeClr val="accent1"/>
+          </a:lnRef>
+          <a:fillRef idx="0">
+            <a:schemeClr val="accent1"/>
+          </a:fillRef>
+          <a:effectRef idx="0">
+            <a:schemeClr val="accent1"/>
+          </a:effectRef>
+          <a:fontRef idx="minor">
+            <a:schemeClr val="tx1"/>
+          </a:fontRef>
+        </p:style>
+      </p:cxnSp>
+    </p:spTree>
+    <p:extLst>
+      <p:ext uri="{BB962C8B-B14F-4D97-AF65-F5344CB8AC3E}">
+        <p14:creationId xmlns:p14="http://schemas.microsoft.com/office/powerpoint/2010/main" val="1843484382"/>
       </p:ext>
     </p:extLst>
   </p:cSld>
